--- a/notas_unidades/unidad1/2_clasificacion_activos.pptx
+++ b/notas_unidades/unidad1/2_clasificacion_activos.pptx
@@ -12,8 +12,6 @@
     <p:sldId id="275" r:id="rId3"/>
     <p:sldId id="276" r:id="rId4"/>
     <p:sldId id="277" r:id="rId5"/>
-    <p:sldId id="278" r:id="rId6"/>
-    <p:sldId id="279" r:id="rId7"/>
     <p:sldId id="280" r:id="rId8"/>
     <p:sldId id="281" r:id="rId9"/>
   </p:sldIdLst>
@@ -562,174 +560,6 @@
             <a:fld id="{F7021451-1387-4CA6-816F-3879F97B5CBC}" type="slidenum">
               <a:rPr lang="en-US"/>
               <a:t>4</a:t>
-            </a:fld>
-            <a:endParaRPr lang="en-US"/>
-          </a:p>
-        </p:txBody>
-      </p:sp>
-    </p:spTree>
-    <p:extLst>
-      <p:ext uri="{BB962C8B-B14F-4D97-AF65-F5344CB8AC3E}">
-        <p14:creationId xmlns:p14="http://schemas.microsoft.com/office/powerpoint/2010/main" val="1024086991"/>
-      </p:ext>
-    </p:extLst>
-  </p:cSld>
-  <p:clrMapOvr>
-    <a:masterClrMapping/>
-  </p:clrMapOvr>
-</p:notes>
-</file>
-
-<file path=ppt/notesSlides/notesSlide5.xml><?xml version="1.0" encoding="utf-8"?>
-<p:notes xmlns:a="http://schemas.openxmlformats.org/drawingml/2006/main" xmlns:r="http://schemas.openxmlformats.org/officeDocument/2006/relationships" xmlns:p="http://schemas.openxmlformats.org/presentationml/2006/main">
-  <p:cSld>
-    <p:spTree>
-      <p:nvGrpSpPr>
-        <p:cNvPr id="1" name=""/>
-        <p:cNvGrpSpPr/>
-        <p:nvPr/>
-      </p:nvGrpSpPr>
-      <p:grpSpPr>
-        <a:xfrm>
-          <a:off x="0" y="0"/>
-          <a:ext cx="0" cy="0"/>
-          <a:chOff x="0" y="0"/>
-          <a:chExt cx="0" cy="0"/>
-        </a:xfrm>
-      </p:grpSpPr>
-      <p:sp>
-        <p:nvSpPr>
-          <p:cNvPr id="2" name="Slide Image Placeholder 1"/>
-          <p:cNvSpPr>
-            <a:spLocks noGrp="1" noRot="1" noChangeAspect="1"/>
-          </p:cNvSpPr>
-          <p:nvPr>
-            <p:ph type="sldImg"/>
-          </p:nvPr>
-        </p:nvSpPr>
-        <p:spPr/>
-      </p:sp>
-      <p:sp>
-        <p:nvSpPr>
-          <p:cNvPr id="3" name="Notes Placeholder 2"/>
-          <p:cNvSpPr>
-            <a:spLocks noGrp="1"/>
-          </p:cNvSpPr>
-          <p:nvPr>
-            <p:ph type="body" idx="1"/>
-          </p:nvPr>
-        </p:nvSpPr>
-        <p:spPr/>
-        <p:txBody>
-          <a:bodyPr/>
-          <a:lstStyle/>
-          <a:p>
-            <a:endParaRPr lang="en-US" dirty="0"/>
-          </a:p>
-        </p:txBody>
-      </p:sp>
-      <p:sp>
-        <p:nvSpPr>
-          <p:cNvPr id="4" name="Slide Number Placeholder 3"/>
-          <p:cNvSpPr>
-            <a:spLocks noGrp="1"/>
-          </p:cNvSpPr>
-          <p:nvPr>
-            <p:ph type="sldNum" sz="quarter" idx="10"/>
-          </p:nvPr>
-        </p:nvSpPr>
-        <p:spPr/>
-        <p:txBody>
-          <a:bodyPr/>
-          <a:lstStyle/>
-          <a:p>
-            <a:fld id="{F7021451-1387-4CA6-816F-3879F97B5CBC}" type="slidenum">
-              <a:rPr lang="en-US"/>
-              <a:t>5</a:t>
-            </a:fld>
-            <a:endParaRPr lang="en-US"/>
-          </a:p>
-        </p:txBody>
-      </p:sp>
-    </p:spTree>
-    <p:extLst>
-      <p:ext uri="{BB962C8B-B14F-4D97-AF65-F5344CB8AC3E}">
-        <p14:creationId xmlns:p14="http://schemas.microsoft.com/office/powerpoint/2010/main" val="1024086991"/>
-      </p:ext>
-    </p:extLst>
-  </p:cSld>
-  <p:clrMapOvr>
-    <a:masterClrMapping/>
-  </p:clrMapOvr>
-</p:notes>
-</file>
-
-<file path=ppt/notesSlides/notesSlide6.xml><?xml version="1.0" encoding="utf-8"?>
-<p:notes xmlns:a="http://schemas.openxmlformats.org/drawingml/2006/main" xmlns:r="http://schemas.openxmlformats.org/officeDocument/2006/relationships" xmlns:p="http://schemas.openxmlformats.org/presentationml/2006/main">
-  <p:cSld>
-    <p:spTree>
-      <p:nvGrpSpPr>
-        <p:cNvPr id="1" name=""/>
-        <p:cNvGrpSpPr/>
-        <p:nvPr/>
-      </p:nvGrpSpPr>
-      <p:grpSpPr>
-        <a:xfrm>
-          <a:off x="0" y="0"/>
-          <a:ext cx="0" cy="0"/>
-          <a:chOff x="0" y="0"/>
-          <a:chExt cx="0" cy="0"/>
-        </a:xfrm>
-      </p:grpSpPr>
-      <p:sp>
-        <p:nvSpPr>
-          <p:cNvPr id="2" name="Slide Image Placeholder 1"/>
-          <p:cNvSpPr>
-            <a:spLocks noGrp="1" noRot="1" noChangeAspect="1"/>
-          </p:cNvSpPr>
-          <p:nvPr>
-            <p:ph type="sldImg"/>
-          </p:nvPr>
-        </p:nvSpPr>
-        <p:spPr/>
-      </p:sp>
-      <p:sp>
-        <p:nvSpPr>
-          <p:cNvPr id="3" name="Notes Placeholder 2"/>
-          <p:cNvSpPr>
-            <a:spLocks noGrp="1"/>
-          </p:cNvSpPr>
-          <p:nvPr>
-            <p:ph type="body" idx="1"/>
-          </p:nvPr>
-        </p:nvSpPr>
-        <p:spPr/>
-        <p:txBody>
-          <a:bodyPr/>
-          <a:lstStyle/>
-          <a:p>
-            <a:endParaRPr lang="en-US" dirty="0"/>
-          </a:p>
-        </p:txBody>
-      </p:sp>
-      <p:sp>
-        <p:nvSpPr>
-          <p:cNvPr id="4" name="Slide Number Placeholder 3"/>
-          <p:cNvSpPr>
-            <a:spLocks noGrp="1"/>
-          </p:cNvSpPr>
-          <p:nvPr>
-            <p:ph type="sldNum" sz="quarter" idx="10"/>
-          </p:nvPr>
-        </p:nvSpPr>
-        <p:spPr/>
-        <p:txBody>
-          <a:bodyPr/>
-          <a:lstStyle/>
-          <a:p>
-            <a:fld id="{F7021451-1387-4CA6-816F-3879F97B5CBC}" type="slidenum">
-              <a:rPr lang="en-US"/>
-              <a:t>6</a:t>
             </a:fld>
             <a:endParaRPr lang="en-US"/>
           </a:p>
@@ -1402,13 +1232,13 @@
             <a:r>
               <a:rPr lang="en-US" sz="4000" b="1" dirty="0">
                 <a:solidFill>
-                  <a:srgbClr val="FFFFFF"/>
+                  <a:srgbClr val="141B4D"/>
                 </a:solidFill>
                 <a:latin typeface="Cambria" pitchFamily="34" charset="0"/>
                 <a:ea typeface="Cambria" pitchFamily="34" charset="-122"/>
                 <a:cs typeface="Cambria" pitchFamily="34" charset="-120"/>
               </a:rPr>
-              <a:t>Clasificación de Activos y Mercados Financieros</a:t>
+              <a:t>Clasificación de Activos Financieros</a:t>
             </a:r>
             <a:endParaRPr lang="en-US" sz="4000" dirty="0"/>
           </a:p>
@@ -1486,7 +1316,7 @@
                 <a:ea typeface="Calibri" pitchFamily="34" charset="-122"/>
                 <a:cs typeface="Calibri" pitchFamily="34" charset="-120"/>
               </a:rPr>
-              <a:t>Fuentes: Mántey de Anguiano (2024), Mishkin y Eakins (2014)</a:t>
+              <a:t>Fuentes: Mántey de Anguiano (2024)</a:t>
             </a:r>
             <a:endParaRPr lang="en-US" sz="1050" dirty="0"/>
           </a:p>
@@ -1550,7 +1380,7 @@
                 <a:ea typeface="Calibri" pitchFamily="34" charset="-122"/>
                 <a:cs typeface="Calibri" pitchFamily="34" charset="-120"/>
               </a:rPr>
-              <a:t>CLASIFICACIÓN DE MERCADOS · PANORAMA GENERAL</a:t>
+              <a:t>CLASIFICACIÓN DE ACTIVOS · PANORAMA GENERAL</a:t>
             </a:r>
             <a:endParaRPr lang="en-US" sz="1200" dirty="0"/>
           </a:p>
@@ -1711,7 +1541,7 @@
                 <a:ea typeface="Cambria" pitchFamily="34" charset="-122"/>
                 <a:cs typeface="Cambria" pitchFamily="34" charset="-120"/>
               </a:rPr>
-              <a:t>Que el estudiante clasifique un activo financiero según quién lo emite (deuda directa, deuda indirecta o participación de capital) y según su plazo (mercado de dinero o de capitales).</a:t>
+              <a:t>Que el estudiante clasifique un activo financiero según quién lo emite: deuda directa, deuda indirecta o participación de capital.</a:t>
             </a:r>
             <a:endParaRPr lang="en-US" sz="2400" dirty="0"/>
           </a:p>
@@ -1814,7 +1644,7 @@
                 <a:ea typeface="Calibri" pitchFamily="34" charset="-122"/>
                 <a:cs typeface="Calibri" pitchFamily="34" charset="-120"/>
               </a:rPr>
-              <a:t>CLASIFICACIÓN DE MERCADOS · PANORAMA GENERAL</a:t>
+              <a:t>CLASIFICACIÓN DE ACTIVOS · PANORAMA GENERAL</a:t>
             </a:r>
             <a:endParaRPr lang="en-US" sz="1200" dirty="0"/>
           </a:p>
@@ -1978,13 +1808,13 @@
       </p:sp>
       <p:sp>
         <p:nvSpPr>
-          <p:cNvPr id="39" name="TextBox 38"/>
+          <p:cNvPr id="41" name="TextBox 40"/>
           <p:cNvSpPr txBox="1"/>
           <p:nvPr/>
         </p:nvSpPr>
         <p:spPr>
           <a:xfrm>
-            <a:off x="777240" y="2350008"/>
+            <a:off x="777240" y="2916936"/>
             <a:ext cx="8321040" cy="384048"/>
           </a:xfrm>
           <a:prstGeom prst="rect">
@@ -2005,7 +1835,7 @@
                 </a:solidFill>
                 <a:latin typeface="Calibri"/>
               </a:rPr>
-              <a:t>II.   </a:t>
+              <a:t>II.   Fuentes y referencias</a:t>
             </a:r>
             <a:r>
               <a:rPr sz="1500" b="1" i="0">
@@ -2014,20 +1844,20 @@
                 </a:solidFill>
                 <a:latin typeface="Calibri"/>
               </a:rPr>
-              <a:t>Mercado de dinero y mercado de capitales</a:t>
-            </a:r>
-          </a:p>
-        </p:txBody>
-      </p:sp>
-      <p:sp>
-        <p:nvSpPr>
-          <p:cNvPr id="40" name="TextBox 39"/>
+              <a:t/>
+            </a:r>
+          </a:p>
+        </p:txBody>
+      </p:sp>
+      <p:sp>
+        <p:nvSpPr>
+          <p:cNvPr id="42" name="TextBox 41"/>
           <p:cNvSpPr txBox="1"/>
           <p:nvPr/>
         </p:nvSpPr>
         <p:spPr>
           <a:xfrm>
-            <a:off x="9189720" y="2350008"/>
+            <a:off x="9189720" y="2916936"/>
             <a:ext cx="1828800" cy="384048"/>
           </a:xfrm>
           <a:prstGeom prst="rect">
@@ -2050,162 +1880,6 @@
                 <a:latin typeface="Calibri"/>
               </a:rPr>
               <a:t>PÁG. 05</a:t>
-            </a:r>
-          </a:p>
-        </p:txBody>
-      </p:sp>
-      <p:sp>
-        <p:nvSpPr>
-          <p:cNvPr id="41" name="TextBox 40"/>
-          <p:cNvSpPr txBox="1"/>
-          <p:nvPr/>
-        </p:nvSpPr>
-        <p:spPr>
-          <a:xfrm>
-            <a:off x="777240" y="2916936"/>
-            <a:ext cx="8321040" cy="384048"/>
-          </a:xfrm>
-          <a:prstGeom prst="rect">
-            <a:avLst/>
-          </a:prstGeom>
-          <a:noFill/>
-        </p:spPr>
-        <p:txBody>
-          <a:bodyPr wrap="square">
-            <a:spAutoFit/>
-          </a:bodyPr>
-          <a:lstStyle/>
-          <a:p>
-            <a:r>
-              <a:rPr sz="1500" b="1" i="0">
-                <a:solidFill>
-                  <a:srgbClr val="C9A227"/>
-                </a:solidFill>
-                <a:latin typeface="Calibri"/>
-              </a:rPr>
-              <a:t>III.   </a:t>
-            </a:r>
-            <a:r>
-              <a:rPr sz="1500" b="1" i="0">
-                <a:solidFill>
-                  <a:srgbClr val="1E2761"/>
-                </a:solidFill>
-                <a:latin typeface="Calibri"/>
-              </a:rPr>
-              <a:t>Agentes económicos y su acceso a los mercados</a:t>
-            </a:r>
-          </a:p>
-        </p:txBody>
-      </p:sp>
-      <p:sp>
-        <p:nvSpPr>
-          <p:cNvPr id="42" name="TextBox 41"/>
-          <p:cNvSpPr txBox="1"/>
-          <p:nvPr/>
-        </p:nvSpPr>
-        <p:spPr>
-          <a:xfrm>
-            <a:off x="9189720" y="2916936"/>
-            <a:ext cx="1828800" cy="384048"/>
-          </a:xfrm>
-          <a:prstGeom prst="rect">
-            <a:avLst/>
-          </a:prstGeom>
-          <a:noFill/>
-        </p:spPr>
-        <p:txBody>
-          <a:bodyPr wrap="square">
-            <a:spAutoFit/>
-          </a:bodyPr>
-          <a:lstStyle/>
-          <a:p>
-            <a:pPr algn="r"/>
-            <a:r>
-              <a:rPr sz="1100" b="0" i="0">
-                <a:solidFill>
-                  <a:srgbClr val="A6ADC7"/>
-                </a:solidFill>
-                <a:latin typeface="Calibri"/>
-              </a:rPr>
-              <a:t>PÁG. 06</a:t>
-            </a:r>
-          </a:p>
-        </p:txBody>
-      </p:sp>
-      <p:sp>
-        <p:nvSpPr>
-          <p:cNvPr id="43" name="TextBox 42"/>
-          <p:cNvSpPr txBox="1"/>
-          <p:nvPr/>
-        </p:nvSpPr>
-        <p:spPr>
-          <a:xfrm>
-            <a:off x="777240" y="3483864"/>
-            <a:ext cx="8321040" cy="384048"/>
-          </a:xfrm>
-          <a:prstGeom prst="rect">
-            <a:avLst/>
-          </a:prstGeom>
-          <a:noFill/>
-        </p:spPr>
-        <p:txBody>
-          <a:bodyPr wrap="square">
-            <a:spAutoFit/>
-          </a:bodyPr>
-          <a:lstStyle/>
-          <a:p>
-            <a:r>
-              <a:rPr sz="1500" b="1" i="0">
-                <a:solidFill>
-                  <a:srgbClr val="C9A227"/>
-                </a:solidFill>
-                <a:latin typeface="Calibri"/>
-              </a:rPr>
-              <a:t>IV.   </a:t>
-            </a:r>
-            <a:r>
-              <a:rPr sz="1500" b="1" i="0">
-                <a:solidFill>
-                  <a:srgbClr val="1E2761"/>
-                </a:solidFill>
-                <a:latin typeface="Calibri"/>
-              </a:rPr>
-              <a:t>Fuentes y referencias</a:t>
-            </a:r>
-          </a:p>
-        </p:txBody>
-      </p:sp>
-      <p:sp>
-        <p:nvSpPr>
-          <p:cNvPr id="44" name="TextBox 43"/>
-          <p:cNvSpPr txBox="1"/>
-          <p:nvPr/>
-        </p:nvSpPr>
-        <p:spPr>
-          <a:xfrm>
-            <a:off x="9189720" y="3483864"/>
-            <a:ext cx="1828800" cy="384048"/>
-          </a:xfrm>
-          <a:prstGeom prst="rect">
-            <a:avLst/>
-          </a:prstGeom>
-          <a:noFill/>
-        </p:spPr>
-        <p:txBody>
-          <a:bodyPr wrap="square">
-            <a:spAutoFit/>
-          </a:bodyPr>
-          <a:lstStyle/>
-          <a:p>
-            <a:pPr algn="r"/>
-            <a:r>
-              <a:rPr sz="1100" b="0" i="0">
-                <a:solidFill>
-                  <a:srgbClr val="A6ADC7"/>
-                </a:solidFill>
-                <a:latin typeface="Calibri"/>
-              </a:rPr>
-              <a:t>PÁG. 07</a:t>
             </a:r>
           </a:p>
         </p:txBody>
@@ -2268,7 +1942,7 @@
                 <a:ea typeface="Calibri" pitchFamily="34" charset="-122"/>
                 <a:cs typeface="Calibri" pitchFamily="34" charset="-120"/>
               </a:rPr>
-              <a:t>CLASIFICACIÓN DE ACTIVOS Y MERCADOS · 12 MIN</a:t>
+              <a:t>CLASIFICACIÓN DE ACTIVOS · 12 MIN</a:t>
             </a:r>
             <a:endParaRPr lang="en-US" sz="1200" dirty="0"/>
           </a:p>
@@ -3808,7 +3482,7 @@
                 <a:ea typeface="Calibri" pitchFamily="34" charset="-122"/>
                 <a:cs typeface="Calibri" pitchFamily="34" charset="-120"/>
               </a:rPr>
-              <a:t>CLASIFICACIÓN DE ACTIVOS Y MERCADOS · 12 MIN</a:t>
+              <a:t>PREPARACIÓN DOCENTE</a:t>
             </a:r>
             <a:endParaRPr lang="en-US" sz="1200" dirty="0"/>
           </a:p>
@@ -3816,132 +3490,20 @@
       </p:sp>
       <p:sp>
         <p:nvSpPr>
-          <p:cNvPr id="3" name="Text 1"/>
-          <p:cNvSpPr/>
-          <p:nvPr/>
-        </p:nvSpPr>
-        <p:spPr>
-          <a:xfrm>
-            <a:off x="640080" y="749808"/>
-            <a:ext cx="9601200" cy="777240"/>
-          </a:xfrm>
-          <a:prstGeom prst="rect">
-            <a:avLst/>
-          </a:prstGeom>
-          <a:noFill/>
-          <a:ln/>
-        </p:spPr>
-        <p:txBody>
-          <a:bodyPr wrap="square" lIns="0" tIns="0" rIns="0" bIns="0" rtlCol="0" anchor="ctr"/>
-          <a:lstStyle/>
-          <a:p>
-            <a:pPr marL="0" indent="0">
-              <a:buNone/>
-            </a:pPr>
-            <a:r>
-              <a:rPr lang="en-US" sz="3200" b="1" dirty="0">
-                <a:solidFill>
-                  <a:srgbClr val="1E2761"/>
-                </a:solidFill>
-                <a:latin typeface="Cambria" pitchFamily="34" charset="0"/>
-                <a:ea typeface="Cambria" pitchFamily="34" charset="-122"/>
-                <a:cs typeface="Cambria" pitchFamily="34" charset="-120"/>
-              </a:rPr>
-              <a:t>Mercado de dinero y mercado de capitales</a:t>
-            </a:r>
-            <a:endParaRPr lang="en-US" sz="3200" dirty="0"/>
-          </a:p>
-        </p:txBody>
-      </p:sp>
-      <p:sp>
-        <p:nvSpPr>
-          <p:cNvPr id="4" name="Text 2"/>
-          <p:cNvSpPr/>
-          <p:nvPr/>
-        </p:nvSpPr>
-        <p:spPr>
-          <a:xfrm>
-            <a:off x="640080" y="1481328"/>
-            <a:ext cx="10058400" cy="365760"/>
-          </a:xfrm>
-          <a:prstGeom prst="rect">
-            <a:avLst/>
-          </a:prstGeom>
-          <a:noFill/>
-          <a:ln/>
-        </p:spPr>
-        <p:txBody>
-          <a:bodyPr wrap="square" lIns="0" tIns="0" rIns="0" bIns="0" rtlCol="0" anchor="ctr"/>
-          <a:lstStyle/>
-          <a:p>
-            <a:pPr marL="0" indent="0">
-              <a:buNone/>
-            </a:pPr>
-            <a:r>
-              <a:rPr lang="en-US" sz="1400" dirty="0">
-                <a:solidFill>
-                  <a:srgbClr val="5B6482"/>
-                </a:solidFill>
-                <a:latin typeface="Calibri" pitchFamily="34" charset="0"/>
-                <a:ea typeface="Calibri" pitchFamily="34" charset="-122"/>
-                <a:cs typeface="Calibri" pitchFamily="34" charset="-120"/>
-              </a:rPr>
-              <a:t>El mercado financiero se divide, por convención, según el plazo de los recursos que canaliza.</a:t>
-            </a:r>
-            <a:endParaRPr lang="en-US" sz="1400" dirty="0"/>
-          </a:p>
-        </p:txBody>
-      </p:sp>
-      <p:sp>
-        <p:nvSpPr>
-          <p:cNvPr id="5" name="Shape 3"/>
-          <p:cNvSpPr/>
-          <p:nvPr/>
-        </p:nvSpPr>
-        <p:spPr>
-          <a:xfrm>
-            <a:off x="640080" y="1965960"/>
-            <a:ext cx="5257800" cy="3246120"/>
-          </a:xfrm>
-          <a:prstGeom prst="roundRect">
-            <a:avLst>
-              <a:gd name="adj" fmla="val 2817"/>
-            </a:avLst>
+          <p:cNvPr id="3" name="Shape 1"/>
+          <p:cNvSpPr/>
+          <p:nvPr/>
+        </p:nvSpPr>
+        <p:spPr>
+          <a:xfrm>
+            <a:off x="10771632" y="457200"/>
+            <a:ext cx="640080" cy="640080"/>
+          </a:xfrm>
+          <a:prstGeom prst="ellipse">
+            <a:avLst/>
           </a:prstGeom>
           <a:solidFill>
-            <a:srgbClr val="FFFFFF"/>
-          </a:solidFill>
-          <a:ln w="15875">
-            <a:solidFill>
-              <a:srgbClr val="E1E7F5"/>
-            </a:solidFill>
-            <a:prstDash val="solid"/>
-          </a:ln>
-        </p:spPr>
-        <p:txBody>
-          <a:bodyPr/>
-          <a:lstStyle/>
-          <a:p>
-            <a:endParaRPr/>
-          </a:p>
-        </p:txBody>
-      </p:sp>
-      <p:sp>
-        <p:nvSpPr>
-          <p:cNvPr id="6" name="Shape 4"/>
-          <p:cNvSpPr/>
-          <p:nvPr/>
-        </p:nvSpPr>
-        <p:spPr>
-          <a:xfrm>
-            <a:off x="1005840" y="2258568"/>
-            <a:ext cx="566928" cy="566928"/>
-          </a:xfrm>
-          <a:prstGeom prst="ellipse">
-            <a:avLst/>
-          </a:prstGeom>
-          <a:solidFill>
-            <a:srgbClr val="1E2761"/>
+            <a:srgbClr val="EEF3FC"/>
           </a:solidFill>
           <a:ln/>
         </p:spPr>
@@ -3955,7 +3517,7 @@
       </p:sp>
       <p:pic>
         <p:nvPicPr>
-          <p:cNvPr id="7" name="Image 0" descr="/tmp/work/deck/icons/coins_navy.png"/>
+          <p:cNvPr id="4" name="Image 0" descr="/tmp/work/deck/icons/bookopen_navy.png"/>
           <p:cNvPicPr>
             <a:picLocks noChangeAspect="1"/>
           </p:cNvPicPr>
@@ -3969,8 +3531,8 @@
         </p:blipFill>
         <p:spPr>
           <a:xfrm>
-            <a:off x="1141903" y="2394631"/>
-            <a:ext cx="294803" cy="294803"/>
+            <a:off x="10931652" y="617220"/>
+            <a:ext cx="320040" cy="320040"/>
           </a:xfrm>
           <a:prstGeom prst="rect">
             <a:avLst/>
@@ -3979,14 +3541,14 @@
       </p:pic>
       <p:sp>
         <p:nvSpPr>
-          <p:cNvPr id="8" name="Text 5"/>
-          <p:cNvSpPr/>
-          <p:nvPr/>
-        </p:nvSpPr>
-        <p:spPr>
-          <a:xfrm>
-            <a:off x="1691640" y="2276856"/>
-            <a:ext cx="3886200" cy="329184"/>
+          <p:cNvPr id="5" name="Text 2"/>
+          <p:cNvSpPr/>
+          <p:nvPr/>
+        </p:nvSpPr>
+        <p:spPr>
+          <a:xfrm>
+            <a:off x="640080" y="749808"/>
+            <a:ext cx="9601200" cy="777240"/>
           </a:xfrm>
           <a:prstGeom prst="rect">
             <a:avLst/>
@@ -4002,7 +3564,7 @@
               <a:buNone/>
             </a:pPr>
             <a:r>
-              <a:rPr lang="en-US" sz="1650" b="1" dirty="0">
+              <a:rPr lang="en-US" sz="3200" b="1" dirty="0">
                 <a:solidFill>
                   <a:srgbClr val="1E2761"/>
                 </a:solidFill>
@@ -4010,22 +3572,22 @@
                 <a:ea typeface="Cambria" pitchFamily="34" charset="-122"/>
                 <a:cs typeface="Cambria" pitchFamily="34" charset="-120"/>
               </a:rPr>
-              <a:t>Mercado de dinero</a:t>
-            </a:r>
-            <a:endParaRPr lang="en-US" sz="1650" dirty="0"/>
-          </a:p>
-        </p:txBody>
-      </p:sp>
-      <p:sp>
-        <p:nvSpPr>
-          <p:cNvPr id="9" name="Text 6"/>
-          <p:cNvSpPr/>
-          <p:nvPr/>
-        </p:nvSpPr>
-        <p:spPr>
-          <a:xfrm>
-            <a:off x="1691640" y="2596896"/>
-            <a:ext cx="3886200" cy="237744"/>
+              <a:t>Fuentes y referencias recomendadas</a:t>
+            </a:r>
+            <a:endParaRPr lang="en-US" sz="3200" dirty="0"/>
+          </a:p>
+        </p:txBody>
+      </p:sp>
+      <p:sp>
+        <p:nvSpPr>
+          <p:cNvPr id="36" name="Text 27"/>
+          <p:cNvSpPr/>
+          <p:nvPr/>
+        </p:nvSpPr>
+        <p:spPr>
+          <a:xfrm>
+            <a:off x="11365992" y="6446520"/>
+            <a:ext cx="548640" cy="274320"/>
           </a:xfrm>
           <a:prstGeom prst="rect">
             <a:avLst/>
@@ -4034,22 +3596,22 @@
           <a:ln/>
         </p:spPr>
         <p:txBody>
-          <a:bodyPr wrap="square" lIns="0" tIns="0" rIns="0" bIns="0" rtlCol="0" anchor="ctr"/>
-          <a:lstStyle/>
-          <a:p>
-            <a:pPr marL="0" indent="0">
+          <a:bodyPr wrap="square" rtlCol="0" anchor="ctr"/>
+          <a:lstStyle/>
+          <a:p>
+            <a:pPr marL="0" indent="0" algn="r">
               <a:buNone/>
             </a:pPr>
             <a:r>
-              <a:rPr lang="en-US" sz="1000" b="1" kern="0" spc="100" dirty="0">
-                <a:solidFill>
-                  <a:srgbClr val="C9A227"/>
+              <a:rPr lang="en-US" sz="1000" dirty="0">
+                <a:solidFill>
+                  <a:srgbClr val="A6ADC7"/>
                 </a:solidFill>
                 <a:latin typeface="Calibri" pitchFamily="34" charset="0"/>
                 <a:ea typeface="Calibri" pitchFamily="34" charset="-122"/>
                 <a:cs typeface="Calibri" pitchFamily="34" charset="-120"/>
               </a:rPr>
-              <a:t>CORTO PLAZO</a:t>
+              <a:t>05</a:t>
             </a:r>
             <a:endParaRPr lang="en-US" sz="1000" dirty="0"/>
           </a:p>
@@ -4057,691 +3619,14 @@
       </p:sp>
       <p:sp>
         <p:nvSpPr>
-          <p:cNvPr id="10" name="Shape 7"/>
-          <p:cNvSpPr/>
-          <p:nvPr/>
-        </p:nvSpPr>
-        <p:spPr>
-          <a:xfrm>
-            <a:off x="1024128" y="3118104"/>
-            <a:ext cx="82296" cy="82296"/>
-          </a:xfrm>
-          <a:prstGeom prst="ellipse">
-            <a:avLst/>
-          </a:prstGeom>
-          <a:solidFill>
-            <a:srgbClr val="C9A227"/>
-          </a:solidFill>
-          <a:ln/>
-        </p:spPr>
-        <p:txBody>
-          <a:bodyPr/>
-          <a:lstStyle/>
-          <a:p>
-            <a:endParaRPr/>
-          </a:p>
-        </p:txBody>
-      </p:sp>
-      <p:sp>
-        <p:nvSpPr>
-          <p:cNvPr id="11" name="Text 8"/>
-          <p:cNvSpPr/>
-          <p:nvPr/>
-        </p:nvSpPr>
-        <p:spPr>
-          <a:xfrm>
-            <a:off x="1234440" y="2980944"/>
-            <a:ext cx="4297680" cy="658368"/>
-          </a:xfrm>
-          <a:prstGeom prst="rect">
-            <a:avLst/>
-          </a:prstGeom>
-          <a:noFill/>
-          <a:ln/>
-        </p:spPr>
-        <p:txBody>
-          <a:bodyPr wrap="square" lIns="0" tIns="0" rIns="0" bIns="0" rtlCol="0" anchor="t"/>
-          <a:lstStyle/>
-          <a:p>
-            <a:pPr marL="0" indent="0">
-              <a:lnSpc>
-                <a:spcPct val="112000"/>
-              </a:lnSpc>
-              <a:buNone/>
-            </a:pPr>
-            <a:r>
-              <a:rPr lang="en-US" sz="1080" b="1" dirty="0">
-                <a:solidFill>
-                  <a:srgbClr val="1E2761"/>
-                </a:solidFill>
-                <a:latin typeface="Calibri" pitchFamily="34" charset="0"/>
-                <a:ea typeface="Calibri" pitchFamily="34" charset="-122"/>
-                <a:cs typeface="Calibri" pitchFamily="34" charset="-120"/>
-              </a:rPr>
-              <a:t>Función: </a:t>
-            </a:r>
-            <a:r>
-              <a:rPr lang="en-US" sz="1080" dirty="0">
-                <a:solidFill>
-                  <a:srgbClr val="27314D"/>
-                </a:solidFill>
-                <a:latin typeface="Calibri" pitchFamily="34" charset="0"/>
-                <a:ea typeface="Calibri" pitchFamily="34" charset="-122"/>
-                <a:cs typeface="Calibri" pitchFamily="34" charset="-120"/>
-              </a:rPr>
-              <a:t>dar liquidez de corto plazo a la economía y servir de canal a la política monetaria.</a:t>
-            </a:r>
-            <a:endParaRPr lang="en-US" sz="1080" dirty="0"/>
-          </a:p>
-        </p:txBody>
-      </p:sp>
-      <p:sp>
-        <p:nvSpPr>
-          <p:cNvPr id="12" name="Shape 9"/>
-          <p:cNvSpPr/>
-          <p:nvPr/>
-        </p:nvSpPr>
-        <p:spPr>
-          <a:xfrm>
-            <a:off x="1024128" y="3813048"/>
-            <a:ext cx="82296" cy="82296"/>
-          </a:xfrm>
-          <a:prstGeom prst="ellipse">
-            <a:avLst/>
-          </a:prstGeom>
-          <a:solidFill>
-            <a:srgbClr val="C9A227"/>
-          </a:solidFill>
-          <a:ln/>
-        </p:spPr>
-        <p:txBody>
-          <a:bodyPr/>
-          <a:lstStyle/>
-          <a:p>
-            <a:endParaRPr/>
-          </a:p>
-        </p:txBody>
-      </p:sp>
-      <p:sp>
-        <p:nvSpPr>
-          <p:cNvPr id="13" name="Text 10"/>
-          <p:cNvSpPr/>
-          <p:nvPr/>
-        </p:nvSpPr>
-        <p:spPr>
-          <a:xfrm>
-            <a:off x="1234440" y="3675888"/>
-            <a:ext cx="4297680" cy="658368"/>
-          </a:xfrm>
-          <a:prstGeom prst="rect">
-            <a:avLst/>
-          </a:prstGeom>
-          <a:noFill/>
-          <a:ln/>
-        </p:spPr>
-        <p:txBody>
-          <a:bodyPr wrap="square" lIns="0" tIns="0" rIns="0" bIns="0" rtlCol="0" anchor="t"/>
-          <a:lstStyle/>
-          <a:p>
-            <a:pPr marL="0" indent="0">
-              <a:lnSpc>
-                <a:spcPct val="112000"/>
-              </a:lnSpc>
-              <a:buNone/>
-            </a:pPr>
-            <a:r>
-              <a:rPr lang="en-US" sz="1080" dirty="0">
-                <a:solidFill>
-                  <a:srgbClr val="27314D"/>
-                </a:solidFill>
-                <a:latin typeface="Calibri" pitchFamily="34" charset="0"/>
-                <a:ea typeface="Calibri" pitchFamily="34" charset="-122"/>
-                <a:cs typeface="Calibri" pitchFamily="34" charset="-120"/>
-              </a:rPr>
-              <a:t>Instituciones monetarias (bancos comerciales) emiten pasivos usables como medios de pago.</a:t>
-            </a:r>
-            <a:endParaRPr lang="en-US" sz="1080" dirty="0"/>
-          </a:p>
-        </p:txBody>
-      </p:sp>
-      <p:sp>
-        <p:nvSpPr>
-          <p:cNvPr id="14" name="Shape 11"/>
-          <p:cNvSpPr/>
-          <p:nvPr/>
-        </p:nvSpPr>
-        <p:spPr>
-          <a:xfrm>
-            <a:off x="1024128" y="4507992"/>
-            <a:ext cx="82296" cy="82296"/>
-          </a:xfrm>
-          <a:prstGeom prst="ellipse">
-            <a:avLst/>
-          </a:prstGeom>
-          <a:solidFill>
-            <a:srgbClr val="C9A227"/>
-          </a:solidFill>
-          <a:ln/>
-        </p:spPr>
-        <p:txBody>
-          <a:bodyPr/>
-          <a:lstStyle/>
-          <a:p>
-            <a:endParaRPr/>
-          </a:p>
-        </p:txBody>
-      </p:sp>
-      <p:sp>
-        <p:nvSpPr>
-          <p:cNvPr id="15" name="Text 12"/>
-          <p:cNvSpPr/>
-          <p:nvPr/>
-        </p:nvSpPr>
-        <p:spPr>
-          <a:xfrm>
-            <a:off x="1234440" y="4370832"/>
-            <a:ext cx="4297680" cy="658368"/>
-          </a:xfrm>
-          <a:prstGeom prst="rect">
-            <a:avLst/>
-          </a:prstGeom>
-          <a:noFill/>
-          <a:ln/>
-        </p:spPr>
-        <p:txBody>
-          <a:bodyPr wrap="square" lIns="0" tIns="0" rIns="0" bIns="0" rtlCol="0" anchor="t"/>
-          <a:lstStyle/>
-          <a:p>
-            <a:pPr marL="0" indent="0">
-              <a:lnSpc>
-                <a:spcPct val="112000"/>
-              </a:lnSpc>
-              <a:buNone/>
-            </a:pPr>
-            <a:r>
-              <a:rPr lang="en-US" sz="1080" dirty="0">
-                <a:solidFill>
-                  <a:srgbClr val="27314D"/>
-                </a:solidFill>
-                <a:latin typeface="Calibri" pitchFamily="34" charset="0"/>
-                <a:ea typeface="Calibri" pitchFamily="34" charset="-122"/>
-                <a:cs typeface="Calibri" pitchFamily="34" charset="-120"/>
-              </a:rPr>
-              <a:t>Ejemplo: depósitos a la vista, CETES y papel comercial a corto plazo.</a:t>
-            </a:r>
-            <a:endParaRPr lang="en-US" sz="1080" dirty="0"/>
-          </a:p>
-        </p:txBody>
-      </p:sp>
-      <p:sp>
-        <p:nvSpPr>
-          <p:cNvPr id="16" name="Shape 13"/>
-          <p:cNvSpPr/>
-          <p:nvPr/>
-        </p:nvSpPr>
-        <p:spPr>
-          <a:xfrm>
-            <a:off x="6263640" y="1965960"/>
-            <a:ext cx="5257800" cy="3246120"/>
-          </a:xfrm>
-          <a:prstGeom prst="roundRect">
-            <a:avLst>
-              <a:gd name="adj" fmla="val 2817"/>
-            </a:avLst>
-          </a:prstGeom>
-          <a:solidFill>
-            <a:srgbClr val="FFFFFF"/>
-          </a:solidFill>
-          <a:ln w="15875">
-            <a:solidFill>
-              <a:srgbClr val="E1E7F5"/>
-            </a:solidFill>
-            <a:prstDash val="solid"/>
-          </a:ln>
-        </p:spPr>
-        <p:txBody>
-          <a:bodyPr/>
-          <a:lstStyle/>
-          <a:p>
-            <a:endParaRPr/>
-          </a:p>
-        </p:txBody>
-      </p:sp>
-      <p:sp>
-        <p:nvSpPr>
-          <p:cNvPr id="17" name="Shape 14"/>
-          <p:cNvSpPr/>
-          <p:nvPr/>
-        </p:nvSpPr>
-        <p:spPr>
-          <a:xfrm>
-            <a:off x="6629400" y="2258568"/>
-            <a:ext cx="566928" cy="566928"/>
-          </a:xfrm>
-          <a:prstGeom prst="ellipse">
-            <a:avLst/>
-          </a:prstGeom>
-          <a:solidFill>
-            <a:srgbClr val="1E2761"/>
-          </a:solidFill>
-          <a:ln/>
-        </p:spPr>
-        <p:txBody>
-          <a:bodyPr/>
-          <a:lstStyle/>
-          <a:p>
-            <a:endParaRPr/>
-          </a:p>
-        </p:txBody>
-      </p:sp>
-      <p:pic>
-        <p:nvPicPr>
-          <p:cNvPr id="18" name="Image 1" descr="/tmp/work/deck/icons/chartline_navy.png"/>
-          <p:cNvPicPr>
-            <a:picLocks noChangeAspect="1"/>
-          </p:cNvPicPr>
-          <p:nvPr/>
-        </p:nvPicPr>
-        <p:blipFill>
-          <a:blip r:embed="rId4"/>
-          <a:stretch>
-            <a:fillRect/>
-          </a:stretch>
-        </p:blipFill>
-        <p:spPr>
-          <a:xfrm>
-            <a:off x="6765463" y="2394631"/>
-            <a:ext cx="294803" cy="294803"/>
-          </a:xfrm>
-          <a:prstGeom prst="rect">
-            <a:avLst/>
-          </a:prstGeom>
-        </p:spPr>
-      </p:pic>
-      <p:sp>
-        <p:nvSpPr>
-          <p:cNvPr id="19" name="Text 15"/>
-          <p:cNvSpPr/>
-          <p:nvPr/>
-        </p:nvSpPr>
-        <p:spPr>
-          <a:xfrm>
-            <a:off x="7315200" y="2276856"/>
-            <a:ext cx="3886200" cy="329184"/>
-          </a:xfrm>
-          <a:prstGeom prst="rect">
-            <a:avLst/>
-          </a:prstGeom>
-          <a:noFill/>
-          <a:ln/>
-        </p:spPr>
-        <p:txBody>
-          <a:bodyPr wrap="square" lIns="0" tIns="0" rIns="0" bIns="0" rtlCol="0" anchor="ctr"/>
-          <a:lstStyle/>
-          <a:p>
-            <a:pPr marL="0" indent="0">
-              <a:buNone/>
-            </a:pPr>
-            <a:r>
-              <a:rPr lang="en-US" sz="1650" b="1" dirty="0">
-                <a:solidFill>
-                  <a:srgbClr val="1E2761"/>
-                </a:solidFill>
-                <a:latin typeface="Cambria" pitchFamily="34" charset="0"/>
-                <a:ea typeface="Cambria" pitchFamily="34" charset="-122"/>
-                <a:cs typeface="Cambria" pitchFamily="34" charset="-120"/>
-              </a:rPr>
-              <a:t>Mercado de capitales</a:t>
-            </a:r>
-            <a:endParaRPr lang="en-US" sz="1650" dirty="0"/>
-          </a:p>
-        </p:txBody>
-      </p:sp>
-      <p:sp>
-        <p:nvSpPr>
-          <p:cNvPr id="20" name="Text 16"/>
-          <p:cNvSpPr/>
-          <p:nvPr/>
-        </p:nvSpPr>
-        <p:spPr>
-          <a:xfrm>
-            <a:off x="7315200" y="2596896"/>
-            <a:ext cx="3886200" cy="237744"/>
-          </a:xfrm>
-          <a:prstGeom prst="rect">
-            <a:avLst/>
-          </a:prstGeom>
-          <a:noFill/>
-          <a:ln/>
-        </p:spPr>
-        <p:txBody>
-          <a:bodyPr wrap="square" lIns="0" tIns="0" rIns="0" bIns="0" rtlCol="0" anchor="ctr"/>
-          <a:lstStyle/>
-          <a:p>
-            <a:pPr marL="0" indent="0">
-              <a:buNone/>
-            </a:pPr>
-            <a:r>
-              <a:rPr lang="en-US" sz="1000" b="1" kern="0" spc="100" dirty="0">
-                <a:solidFill>
-                  <a:srgbClr val="C9A227"/>
-                </a:solidFill>
-                <a:latin typeface="Calibri" pitchFamily="34" charset="0"/>
-                <a:ea typeface="Calibri" pitchFamily="34" charset="-122"/>
-                <a:cs typeface="Calibri" pitchFamily="34" charset="-120"/>
-              </a:rPr>
-              <a:t>LARGO PLAZO</a:t>
-            </a:r>
-            <a:endParaRPr lang="en-US" sz="1000" dirty="0"/>
-          </a:p>
-        </p:txBody>
-      </p:sp>
-      <p:sp>
-        <p:nvSpPr>
-          <p:cNvPr id="21" name="Shape 17"/>
-          <p:cNvSpPr/>
-          <p:nvPr/>
-        </p:nvSpPr>
-        <p:spPr>
-          <a:xfrm>
-            <a:off x="6647688" y="3118104"/>
-            <a:ext cx="82296" cy="82296"/>
-          </a:xfrm>
-          <a:prstGeom prst="ellipse">
-            <a:avLst/>
-          </a:prstGeom>
-          <a:solidFill>
-            <a:srgbClr val="C9A227"/>
-          </a:solidFill>
-          <a:ln/>
-        </p:spPr>
-        <p:txBody>
-          <a:bodyPr/>
-          <a:lstStyle/>
-          <a:p>
-            <a:endParaRPr/>
-          </a:p>
-        </p:txBody>
-      </p:sp>
-      <p:sp>
-        <p:nvSpPr>
-          <p:cNvPr id="22" name="Text 18"/>
-          <p:cNvSpPr/>
-          <p:nvPr/>
-        </p:nvSpPr>
-        <p:spPr>
-          <a:xfrm>
-            <a:off x="6858000" y="2980944"/>
-            <a:ext cx="4297680" cy="658368"/>
-          </a:xfrm>
-          <a:prstGeom prst="rect">
-            <a:avLst/>
-          </a:prstGeom>
-          <a:noFill/>
-          <a:ln/>
-        </p:spPr>
-        <p:txBody>
-          <a:bodyPr wrap="square" lIns="0" tIns="0" rIns="0" bIns="0" rtlCol="0" anchor="t"/>
-          <a:lstStyle/>
-          <a:p>
-            <a:pPr marL="0" indent="0">
-              <a:lnSpc>
-                <a:spcPct val="112000"/>
-              </a:lnSpc>
-              <a:buNone/>
-            </a:pPr>
-            <a:r>
-              <a:rPr lang="en-US" sz="1080" b="1" dirty="0">
-                <a:solidFill>
-                  <a:srgbClr val="1E2761"/>
-                </a:solidFill>
-                <a:latin typeface="Calibri" pitchFamily="34" charset="0"/>
-                <a:ea typeface="Calibri" pitchFamily="34" charset="-122"/>
-                <a:cs typeface="Calibri" pitchFamily="34" charset="-120"/>
-              </a:rPr>
-              <a:t>Función: </a:t>
-            </a:r>
-            <a:r>
-              <a:rPr lang="en-US" sz="1080" dirty="0">
-                <a:solidFill>
-                  <a:srgbClr val="27314D"/>
-                </a:solidFill>
-                <a:latin typeface="Calibri" pitchFamily="34" charset="0"/>
-                <a:ea typeface="Calibri" pitchFamily="34" charset="-122"/>
-                <a:cs typeface="Calibri" pitchFamily="34" charset="-120"/>
-              </a:rPr>
-              <a:t>financiar la inversión productiva de largo plazo y diversificar el riesgo entre ahorradores e inversionistas.</a:t>
-            </a:r>
-            <a:endParaRPr lang="en-US" sz="1080" dirty="0"/>
-          </a:p>
-        </p:txBody>
-      </p:sp>
-      <p:sp>
-        <p:nvSpPr>
-          <p:cNvPr id="23" name="Shape 19"/>
-          <p:cNvSpPr/>
-          <p:nvPr/>
-        </p:nvSpPr>
-        <p:spPr>
-          <a:xfrm>
-            <a:off x="6647688" y="3813048"/>
-            <a:ext cx="82296" cy="82296"/>
-          </a:xfrm>
-          <a:prstGeom prst="ellipse">
-            <a:avLst/>
-          </a:prstGeom>
-          <a:solidFill>
-            <a:srgbClr val="C9A227"/>
-          </a:solidFill>
-          <a:ln/>
-        </p:spPr>
-        <p:txBody>
-          <a:bodyPr/>
-          <a:lstStyle/>
-          <a:p>
-            <a:endParaRPr/>
-          </a:p>
-        </p:txBody>
-      </p:sp>
-      <p:sp>
-        <p:nvSpPr>
-          <p:cNvPr id="24" name="Text 20"/>
-          <p:cNvSpPr/>
-          <p:nvPr/>
-        </p:nvSpPr>
-        <p:spPr>
-          <a:xfrm>
-            <a:off x="6858000" y="3675888"/>
-            <a:ext cx="4297680" cy="658368"/>
-          </a:xfrm>
-          <a:prstGeom prst="rect">
-            <a:avLst/>
-          </a:prstGeom>
-          <a:noFill/>
-          <a:ln/>
-        </p:spPr>
-        <p:txBody>
-          <a:bodyPr wrap="square" lIns="0" tIns="0" rIns="0" bIns="0" rtlCol="0" anchor="t"/>
-          <a:lstStyle/>
-          <a:p>
-            <a:pPr marL="0" indent="0">
-              <a:lnSpc>
-                <a:spcPct val="112000"/>
-              </a:lnSpc>
-              <a:buNone/>
-            </a:pPr>
-            <a:r>
-              <a:rPr lang="en-US" sz="1080" dirty="0">
-                <a:solidFill>
-                  <a:srgbClr val="27314D"/>
-                </a:solidFill>
-                <a:latin typeface="Calibri" pitchFamily="34" charset="0"/>
-                <a:ea typeface="Calibri" pitchFamily="34" charset="-122"/>
-                <a:cs typeface="Calibri" pitchFamily="34" charset="-120"/>
-              </a:rPr>
-              <a:t>Instituciones no monetarias (banca de inversión, aseguradoras, bolsa) emiten bonos y acciones.</a:t>
-            </a:r>
-            <a:endParaRPr lang="en-US" sz="1080" dirty="0"/>
-          </a:p>
-        </p:txBody>
-      </p:sp>
-      <p:sp>
-        <p:nvSpPr>
-          <p:cNvPr id="25" name="Shape 21"/>
-          <p:cNvSpPr/>
-          <p:nvPr/>
-        </p:nvSpPr>
-        <p:spPr>
-          <a:xfrm>
-            <a:off x="6647688" y="4507992"/>
-            <a:ext cx="82296" cy="82296"/>
-          </a:xfrm>
-          <a:prstGeom prst="ellipse">
-            <a:avLst/>
-          </a:prstGeom>
-          <a:solidFill>
-            <a:srgbClr val="C9A227"/>
-          </a:solidFill>
-          <a:ln/>
-        </p:spPr>
-        <p:txBody>
-          <a:bodyPr/>
-          <a:lstStyle/>
-          <a:p>
-            <a:endParaRPr/>
-          </a:p>
-        </p:txBody>
-      </p:sp>
-      <p:sp>
-        <p:nvSpPr>
-          <p:cNvPr id="26" name="Text 22"/>
-          <p:cNvSpPr/>
-          <p:nvPr/>
-        </p:nvSpPr>
-        <p:spPr>
-          <a:xfrm>
-            <a:off x="6858000" y="4370832"/>
-            <a:ext cx="4297680" cy="658368"/>
-          </a:xfrm>
-          <a:prstGeom prst="rect">
-            <a:avLst/>
-          </a:prstGeom>
-          <a:noFill/>
-          <a:ln/>
-        </p:spPr>
-        <p:txBody>
-          <a:bodyPr wrap="square" lIns="0" tIns="0" rIns="0" bIns="0" rtlCol="0" anchor="t"/>
-          <a:lstStyle/>
-          <a:p>
-            <a:pPr marL="0" indent="0">
-              <a:lnSpc>
-                <a:spcPct val="112000"/>
-              </a:lnSpc>
-              <a:buNone/>
-            </a:pPr>
-            <a:r>
-              <a:rPr lang="en-US" sz="1080" dirty="0">
-                <a:solidFill>
-                  <a:srgbClr val="27314D"/>
-                </a:solidFill>
-                <a:latin typeface="Calibri" pitchFamily="34" charset="0"/>
-                <a:ea typeface="Calibri" pitchFamily="34" charset="-122"/>
-                <a:cs typeface="Calibri" pitchFamily="34" charset="-120"/>
-              </a:rPr>
-              <a:t>Ejemplo: bonos hipotecarios y acciones ordinarias.</a:t>
-            </a:r>
-            <a:endParaRPr lang="en-US" sz="1080" dirty="0"/>
-          </a:p>
-        </p:txBody>
-      </p:sp>
-      <p:sp>
-        <p:nvSpPr>
-          <p:cNvPr id="34" name="Text 28"/>
-          <p:cNvSpPr/>
-          <p:nvPr/>
-        </p:nvSpPr>
-        <p:spPr>
-          <a:xfrm>
-            <a:off x="640080" y="6400800"/>
-            <a:ext cx="9418320" cy="274320"/>
-          </a:xfrm>
-          <a:prstGeom prst="rect">
-            <a:avLst/>
-          </a:prstGeom>
-          <a:noFill/>
-          <a:ln/>
-        </p:spPr>
-        <p:txBody>
-          <a:bodyPr wrap="square" rtlCol="0" anchor="ctr"/>
-          <a:lstStyle/>
-          <a:p>
-            <a:pPr marL="0" indent="0">
-              <a:buNone/>
-            </a:pPr>
-            <a:r>
-              <a:rPr lang="en-US" sz="950" i="1" dirty="0">
-                <a:solidFill>
-                  <a:srgbClr val="5B6482"/>
-                </a:solidFill>
-                <a:latin typeface="Calibri" pitchFamily="34" charset="0"/>
-                <a:ea typeface="Calibri" pitchFamily="34" charset="-122"/>
-                <a:cs typeface="Calibri" pitchFamily="34" charset="-120"/>
-              </a:rPr>
-              <a:t>Fuente: Mántey de Anguiano, G. (2024), Lección 2 §4, UNAM; Mishkin, F. S. y Eakins, S. G. (2014), Cap. 11, Pearson.</a:t>
-            </a:r>
-            <a:endParaRPr lang="en-US" sz="950" dirty="0"/>
-          </a:p>
-        </p:txBody>
-      </p:sp>
-      <p:sp>
-        <p:nvSpPr>
-          <p:cNvPr id="35" name="Text 29"/>
-          <p:cNvSpPr/>
-          <p:nvPr/>
-        </p:nvSpPr>
-        <p:spPr>
-          <a:xfrm>
-            <a:off x="11365992" y="6446520"/>
-            <a:ext cx="548640" cy="274320"/>
-          </a:xfrm>
-          <a:prstGeom prst="rect">
-            <a:avLst/>
-          </a:prstGeom>
-          <a:noFill/>
-          <a:ln/>
-        </p:spPr>
-        <p:txBody>
-          <a:bodyPr wrap="square" rtlCol="0" anchor="ctr"/>
-          <a:lstStyle/>
-          <a:p>
-            <a:pPr marL="0" indent="0" algn="r">
-              <a:buNone/>
-            </a:pPr>
-            <a:r>
-              <a:rPr lang="en-US" sz="1000" dirty="0">
-                <a:solidFill>
-                  <a:srgbClr val="A6ADC7"/>
-                </a:solidFill>
-                <a:latin typeface="Calibri" pitchFamily="34" charset="0"/>
-                <a:ea typeface="Calibri" pitchFamily="34" charset="-122"/>
-                <a:cs typeface="Calibri" pitchFamily="34" charset="-120"/>
-              </a:rPr>
-              <a:t>05</a:t>
-            </a:r>
-            <a:endParaRPr lang="en-US" sz="1000" dirty="0"/>
-          </a:p>
-        </p:txBody>
-      </p:sp>
-      <p:sp>
-        <p:nvSpPr>
-          <p:cNvPr id="36" name="TextBox 35"/>
+          <p:cNvPr id="37" name="TextBox 36"/>
           <p:cNvSpPr txBox="1"/>
           <p:nvPr/>
         </p:nvSpPr>
         <p:spPr>
           <a:xfrm>
-            <a:off x="640080" y="5303520"/>
-            <a:ext cx="10908792" cy="1005840"/>
+            <a:off x="640080" y="1691640"/>
+            <a:ext cx="9749188" cy="512961"/>
           </a:xfrm>
           <a:prstGeom prst="rect">
             <a:avLst/>
@@ -4755,114 +3640,142 @@
           <a:lstStyle/>
           <a:p>
             <a:pPr>
-              <a:lnSpc>
-                <a:spcPct val="105000"/>
-              </a:lnSpc>
               <a:spcAft>
-                <a:spcPts val="300"/>
+                <a:spcPts val="400"/>
               </a:spcAft>
             </a:pPr>
             <a:r>
-              <a:rPr sz="1100" b="1" i="0">
+              <a:rPr sz="1300" b="1" i="0" dirty="0" err="1">
                 <a:solidFill>
                   <a:srgbClr val="1E2761"/>
                 </a:solidFill>
                 <a:latin typeface="Calibri"/>
               </a:rPr>
-              <a:t>•  </a:t>
-            </a:r>
-            <a:r>
-              <a:rPr sz="1100" b="0" i="0">
+              <a:t>Mántey</a:t>
+            </a:r>
+            <a:r>
+              <a:rPr sz="1300" b="1" i="0" dirty="0">
+                <a:solidFill>
+                  <a:srgbClr val="1E2761"/>
+                </a:solidFill>
+                <a:latin typeface="Calibri"/>
+              </a:rPr>
+              <a:t> de Anguiano, G. (2024). </a:t>
+            </a:r>
+            <a:r>
+              <a:rPr sz="1300" b="1" i="0" dirty="0" err="1">
+                <a:solidFill>
+                  <a:srgbClr val="1E2761"/>
+                </a:solidFill>
+                <a:latin typeface="Calibri"/>
+              </a:rPr>
+              <a:t>Lecciones</a:t>
+            </a:r>
+            <a:r>
+              <a:rPr sz="1300" b="1" i="0" dirty="0">
+                <a:solidFill>
+                  <a:srgbClr val="1E2761"/>
+                </a:solidFill>
+                <a:latin typeface="Calibri"/>
+              </a:rPr>
+              <a:t> de Economía </a:t>
+            </a:r>
+            <a:r>
+              <a:rPr sz="1300" b="1" i="0" dirty="0" err="1">
+                <a:solidFill>
+                  <a:srgbClr val="1E2761"/>
+                </a:solidFill>
+                <a:latin typeface="Calibri"/>
+              </a:rPr>
+              <a:t>Monetaria</a:t>
+            </a:r>
+            <a:r>
+              <a:rPr sz="1300" b="1" i="0" dirty="0">
+                <a:solidFill>
+                  <a:srgbClr val="1E2761"/>
+                </a:solidFill>
+                <a:latin typeface="Calibri"/>
+              </a:rPr>
+              <a:t>. UNAM.</a:t>
+            </a:r>
+          </a:p>
+          <a:p>
+            <a:pPr>
+              <a:spcAft>
+                <a:spcPts val="400"/>
+              </a:spcAft>
+            </a:pPr>
+            <a:r>
+              <a:rPr sz="1100" b="0" i="0" dirty="0" err="1">
                 <a:solidFill>
                   <a:srgbClr val="5B6482"/>
                 </a:solidFill>
                 <a:latin typeface="Calibri"/>
               </a:rPr>
-              <a:t>En México, los bancos múltiples integran ambas funciones desde principios de la década de 1970.</a:t>
-            </a:r>
-          </a:p>
-          <a:p>
-            <a:pPr>
-              <a:lnSpc>
-                <a:spcPct val="105000"/>
-              </a:lnSpc>
-              <a:spcAft>
-                <a:spcPts val="300"/>
-              </a:spcAft>
-            </a:pPr>
-            <a:r>
-              <a:rPr sz="1100" b="1" i="0">
-                <a:solidFill>
-                  <a:srgbClr val="1E2761"/>
+              <a:t>Lección 2: clasificación de activos financieros según el emisor.</a:t>
+            </a:r>
+            <a:r>
+              <a:rPr sz="1100" b="0" i="0" dirty="0">
+                <a:solidFill>
+                  <a:srgbClr val="5B6482"/>
                 </a:solidFill>
                 <a:latin typeface="Calibri"/>
               </a:rPr>
-              <a:t>•  </a:t>
-            </a:r>
-            <a:r>
-              <a:rPr sz="1100" b="0" i="0">
+              <a:t/>
+            </a:r>
+            <a:r>
+              <a:rPr sz="1100" b="0" i="0" dirty="0" err="1">
                 <a:solidFill>
                   <a:srgbClr val="5B6482"/>
                 </a:solidFill>
                 <a:latin typeface="Calibri"/>
               </a:rPr>
-              <a:t>Los mercados de derivados (futuros, opciones, swaps) son un tercer segmento, definido por el instrumento y no por el plazo.</a:t>
-            </a:r>
-          </a:p>
-          <a:p>
-            <a:pPr>
-              <a:lnSpc>
-                <a:spcPct val="105000"/>
-              </a:lnSpc>
-              <a:spcAft>
-                <a:spcPts val="300"/>
-              </a:spcAft>
-            </a:pPr>
-            <a:r>
-              <a:rPr sz="1100" b="1" i="0">
-                <a:solidFill>
-                  <a:srgbClr val="1E2761"/>
+              <a:t/>
+            </a:r>
+            <a:r>
+              <a:rPr sz="1100" b="0" i="0" dirty="0">
+                <a:solidFill>
+                  <a:srgbClr val="5B6482"/>
                 </a:solidFill>
                 <a:latin typeface="Calibri"/>
               </a:rPr>
-              <a:t>•  </a:t>
-            </a:r>
-            <a:r>
-              <a:rPr sz="1100" b="0" i="0">
+              <a:t/>
+            </a:r>
+            <a:r>
+              <a:rPr sz="1100" b="0" i="0" dirty="0" err="1">
                 <a:solidFill>
                   <a:srgbClr val="5B6482"/>
                 </a:solidFill>
                 <a:latin typeface="Calibri"/>
               </a:rPr>
-              <a:t>Es, sobre todo, un mercado mayorista — CETES es la excepción accesible al público, vía Cetesdirecto.</a:t>
-            </a:r>
-          </a:p>
-          <a:p>
-            <a:pPr>
-              <a:lnSpc>
-                <a:spcPct val="105000"/>
-              </a:lnSpc>
-              <a:spcAft>
-                <a:spcPts val="300"/>
-              </a:spcAft>
-            </a:pPr>
-            <a:r>
-              <a:rPr sz="1100" b="1" i="0">
-                <a:solidFill>
-                  <a:srgbClr val="1E2761"/>
+              <a:t/>
+            </a:r>
+            <a:r>
+              <a:rPr sz="1100" b="0" i="0" dirty="0">
+                <a:solidFill>
+                  <a:srgbClr val="5B6482"/>
                 </a:solidFill>
                 <a:latin typeface="Calibri"/>
               </a:rPr>
-              <a:t>•  </a:t>
-            </a:r>
-            <a:r>
-              <a:rPr sz="1100" b="0" i="0">
+              <a:t/>
+            </a:r>
+            <a:r>
+              <a:rPr sz="1100" b="0" i="0" dirty="0" err="1">
                 <a:solidFill>
                   <a:srgbClr val="5B6482"/>
                 </a:solidFill>
                 <a:latin typeface="Calibri"/>
               </a:rPr>
-              <a:t>Banxico lo usa como canal de política monetaria; ahí se mueve la TIIE, la tasa de referencia de corto plazo.</a:t>
+              <a:t/>
+            </a:r>
+            <a:r>
+              <a:rPr sz="1100" b="0" i="0" dirty="0">
+                <a:solidFill>
+                  <a:srgbClr val="5B6482"/>
+                </a:solidFill>
+                <a:latin typeface="Calibri"/>
+              </a:rPr>
+              <a:t/>
             </a:r>
           </a:p>
         </p:txBody>
@@ -4894,14 +3807,41 @@
       </p:grpSpPr>
       <p:sp>
         <p:nvSpPr>
-          <p:cNvPr id="2" name="Text 0"/>
-          <p:cNvSpPr/>
-          <p:nvPr/>
-        </p:nvSpPr>
-        <p:spPr>
-          <a:xfrm>
-            <a:off x="640080" y="457200"/>
-            <a:ext cx="9144000" cy="320040"/>
+          <p:cNvPr id="2" name="Shape 0"/>
+          <p:cNvSpPr/>
+          <p:nvPr/>
+        </p:nvSpPr>
+        <p:spPr>
+          <a:xfrm>
+            <a:off x="-1828800" y="4389120"/>
+            <a:ext cx="5029200" cy="5029200"/>
+          </a:xfrm>
+          <a:prstGeom prst="ellipse">
+            <a:avLst/>
+          </a:prstGeom>
+          <a:solidFill>
+            <a:srgbClr val="141B4D"/>
+          </a:solidFill>
+          <a:ln/>
+        </p:spPr>
+        <p:txBody>
+          <a:bodyPr/>
+          <a:lstStyle/>
+          <a:p>
+            <a:endParaRPr/>
+          </a:p>
+        </p:txBody>
+      </p:sp>
+      <p:sp>
+        <p:nvSpPr>
+          <p:cNvPr id="3" name="Text 1"/>
+          <p:cNvSpPr/>
+          <p:nvPr/>
+        </p:nvSpPr>
+        <p:spPr>
+          <a:xfrm>
+            <a:off x="822960" y="640080"/>
+            <a:ext cx="7315200" cy="365760"/>
           </a:xfrm>
           <a:prstGeom prst="rect">
             <a:avLst/>
@@ -4917,7 +3857,7 @@
               <a:buNone/>
             </a:pPr>
             <a:r>
-              <a:rPr lang="en-US" sz="1200" b="1" kern="0" spc="200" dirty="0">
+              <a:rPr lang="en-US" sz="1300" b="1" kern="0" spc="200" dirty="0">
                 <a:solidFill>
                   <a:srgbClr val="C9A227"/>
                 </a:solidFill>
@@ -4925,2064 +3865,7 @@
                 <a:ea typeface="Calibri" pitchFamily="34" charset="-122"/>
                 <a:cs typeface="Calibri" pitchFamily="34" charset="-120"/>
               </a:rPr>
-              <a:t>CLASIFICACIÓN DE ACTIVOS Y MERCADOS · 12 MIN</a:t>
-            </a:r>
-            <a:endParaRPr lang="en-US" sz="1200" dirty="0"/>
-          </a:p>
-        </p:txBody>
-      </p:sp>
-      <p:sp>
-        <p:nvSpPr>
-          <p:cNvPr id="3" name="Text 1"/>
-          <p:cNvSpPr/>
-          <p:nvPr/>
-        </p:nvSpPr>
-        <p:spPr>
-          <a:xfrm>
-            <a:off x="640080" y="749808"/>
-            <a:ext cx="9601200" cy="777240"/>
-          </a:xfrm>
-          <a:prstGeom prst="rect">
-            <a:avLst/>
-          </a:prstGeom>
-          <a:noFill/>
-          <a:ln/>
-        </p:spPr>
-        <p:txBody>
-          <a:bodyPr wrap="square" lIns="0" tIns="0" rIns="0" bIns="0" rtlCol="0" anchor="ctr"/>
-          <a:lstStyle/>
-          <a:p>
-            <a:pPr marL="0" indent="0">
-              <a:buNone/>
-            </a:pPr>
-            <a:r>
-              <a:rPr lang="en-US" sz="2700" b="1" dirty="0">
-                <a:solidFill>
-                  <a:srgbClr val="1E2761"/>
-                </a:solidFill>
-                <a:latin typeface="Cambria" pitchFamily="34" charset="0"/>
-                <a:ea typeface="Cambria" pitchFamily="34" charset="-122"/>
-                <a:cs typeface="Cambria" pitchFamily="34" charset="-120"/>
-              </a:rPr>
-              <a:t>Agentes económicos y su acceso a los mercados</a:t>
-            </a:r>
-            <a:endParaRPr lang="en-US" sz="2700" dirty="0"/>
-          </a:p>
-        </p:txBody>
-      </p:sp>
-      <p:sp>
-        <p:nvSpPr>
-          <p:cNvPr id="4" name="Text 2"/>
-          <p:cNvSpPr/>
-          <p:nvPr/>
-        </p:nvSpPr>
-        <p:spPr>
-          <a:xfrm>
-            <a:off x="640080" y="1371600"/>
-            <a:ext cx="10058400" cy="365760"/>
-          </a:xfrm>
-          <a:prstGeom prst="rect">
-            <a:avLst/>
-          </a:prstGeom>
-          <a:noFill/>
-          <a:ln/>
-        </p:spPr>
-        <p:txBody>
-          <a:bodyPr wrap="square" lIns="0" tIns="0" rIns="0" bIns="0" rtlCol="0" anchor="ctr"/>
-          <a:lstStyle/>
-          <a:p>
-            <a:pPr marL="0" indent="0">
-              <a:buNone/>
-            </a:pPr>
-            <a:r>
-              <a:rPr lang="en-US" sz="1350" dirty="0">
-                <a:solidFill>
-                  <a:srgbClr val="5B6482"/>
-                </a:solidFill>
-                <a:latin typeface="Calibri" pitchFamily="34" charset="0"/>
-                <a:ea typeface="Calibri" pitchFamily="34" charset="-122"/>
-                <a:cs typeface="Calibri" pitchFamily="34" charset="-120"/>
-              </a:rPr>
-              <a:t>Cada tipo de agente participa en el mercado de dinero y en el de capitales de forma distinta.</a:t>
-            </a:r>
-            <a:endParaRPr lang="en-US" sz="1350" dirty="0"/>
-          </a:p>
-        </p:txBody>
-      </p:sp>
-      <p:sp>
-        <p:nvSpPr>
-          <p:cNvPr id="5" name="Shape 3"/>
-          <p:cNvSpPr/>
-          <p:nvPr/>
-        </p:nvSpPr>
-        <p:spPr>
-          <a:xfrm>
-            <a:off x="640080" y="1783080"/>
-            <a:ext cx="10908792" cy="457200"/>
-          </a:xfrm>
-          <a:prstGeom prst="roundRect">
-            <a:avLst>
-              <a:gd name="adj" fmla="val 16000"/>
-            </a:avLst>
-          </a:prstGeom>
-          <a:solidFill>
-            <a:srgbClr val="1E2761"/>
-          </a:solidFill>
-          <a:ln/>
-        </p:spPr>
-        <p:txBody>
-          <a:bodyPr/>
-          <a:lstStyle/>
-          <a:p>
-            <a:endParaRPr/>
-          </a:p>
-        </p:txBody>
-      </p:sp>
-      <p:sp>
-        <p:nvSpPr>
-          <p:cNvPr id="6" name="Text 4"/>
-          <p:cNvSpPr/>
-          <p:nvPr/>
-        </p:nvSpPr>
-        <p:spPr>
-          <a:xfrm>
-            <a:off x="822960" y="1783080"/>
-            <a:ext cx="2423160" cy="457200"/>
-          </a:xfrm>
-          <a:prstGeom prst="rect">
-            <a:avLst/>
-          </a:prstGeom>
-          <a:noFill/>
-          <a:ln/>
-        </p:spPr>
-        <p:txBody>
-          <a:bodyPr wrap="square" lIns="0" tIns="0" rIns="0" bIns="0" rtlCol="0" anchor="ctr"/>
-          <a:lstStyle/>
-          <a:p>
-            <a:pPr marL="0" indent="0">
-              <a:buNone/>
-            </a:pPr>
-            <a:r>
-              <a:rPr lang="en-US" sz="1000" b="1" kern="0" spc="50" dirty="0">
-                <a:solidFill>
-                  <a:srgbClr val="C9A227"/>
-                </a:solidFill>
-                <a:latin typeface="Calibri" pitchFamily="34" charset="0"/>
-                <a:ea typeface="Calibri" pitchFamily="34" charset="-122"/>
-                <a:cs typeface="Calibri" pitchFamily="34" charset="-120"/>
-              </a:rPr>
-              <a:t>AGENTE ECONÓMICO</a:t>
-            </a:r>
-            <a:endParaRPr lang="en-US" sz="1000" dirty="0"/>
-          </a:p>
-        </p:txBody>
-      </p:sp>
-      <p:sp>
-        <p:nvSpPr>
-          <p:cNvPr id="7" name="Text 5"/>
-          <p:cNvSpPr/>
-          <p:nvPr/>
-        </p:nvSpPr>
-        <p:spPr>
-          <a:xfrm>
-            <a:off x="3383280" y="1783080"/>
-            <a:ext cx="3977640" cy="457200"/>
-          </a:xfrm>
-          <a:prstGeom prst="rect">
-            <a:avLst/>
-          </a:prstGeom>
-          <a:noFill/>
-          <a:ln/>
-        </p:spPr>
-        <p:txBody>
-          <a:bodyPr wrap="square" lIns="0" tIns="0" rIns="0" bIns="0" rtlCol="0" anchor="ctr"/>
-          <a:lstStyle/>
-          <a:p>
-            <a:pPr marL="0" indent="0">
-              <a:buNone/>
-            </a:pPr>
-            <a:r>
-              <a:rPr lang="en-US" sz="1000" b="1" kern="0" spc="50" dirty="0">
-                <a:solidFill>
-                  <a:srgbClr val="FFFFFF"/>
-                </a:solidFill>
-                <a:latin typeface="Calibri" pitchFamily="34" charset="0"/>
-                <a:ea typeface="Calibri" pitchFamily="34" charset="-122"/>
-                <a:cs typeface="Calibri" pitchFamily="34" charset="-120"/>
-              </a:rPr>
-              <a:t>MERCADO DE DINERO (corto plazo)</a:t>
-            </a:r>
-            <a:endParaRPr lang="en-US" sz="1000" dirty="0"/>
-          </a:p>
-        </p:txBody>
-      </p:sp>
-      <p:sp>
-        <p:nvSpPr>
-          <p:cNvPr id="8" name="Text 6"/>
-          <p:cNvSpPr/>
-          <p:nvPr/>
-        </p:nvSpPr>
-        <p:spPr>
-          <a:xfrm>
-            <a:off x="7498080" y="1783080"/>
-            <a:ext cx="3867912" cy="457200"/>
-          </a:xfrm>
-          <a:prstGeom prst="rect">
-            <a:avLst/>
-          </a:prstGeom>
-          <a:noFill/>
-          <a:ln/>
-        </p:spPr>
-        <p:txBody>
-          <a:bodyPr wrap="square" lIns="0" tIns="0" rIns="0" bIns="0" rtlCol="0" anchor="ctr"/>
-          <a:lstStyle/>
-          <a:p>
-            <a:pPr marL="0" indent="0">
-              <a:buNone/>
-            </a:pPr>
-            <a:r>
-              <a:rPr lang="en-US" sz="1000" b="1" kern="0" spc="50" dirty="0">
-                <a:solidFill>
-                  <a:srgbClr val="FFFFFF"/>
-                </a:solidFill>
-                <a:latin typeface="Calibri" pitchFamily="34" charset="0"/>
-                <a:ea typeface="Calibri" pitchFamily="34" charset="-122"/>
-                <a:cs typeface="Calibri" pitchFamily="34" charset="-120"/>
-              </a:rPr>
-              <a:t>MERCADO DE CAPITALES (largo plazo)</a:t>
-            </a:r>
-            <a:endParaRPr lang="en-US" sz="1000" dirty="0"/>
-          </a:p>
-        </p:txBody>
-      </p:sp>
-      <p:sp>
-        <p:nvSpPr>
-          <p:cNvPr id="9" name="Shape 7"/>
-          <p:cNvSpPr/>
-          <p:nvPr/>
-        </p:nvSpPr>
-        <p:spPr>
-          <a:xfrm>
-            <a:off x="640080" y="2240280"/>
-            <a:ext cx="10908792" cy="658368"/>
-          </a:xfrm>
-          <a:prstGeom prst="rect">
-            <a:avLst/>
-          </a:prstGeom>
-          <a:solidFill>
-            <a:srgbClr val="EEF3FC"/>
-          </a:solidFill>
-          <a:ln/>
-        </p:spPr>
-        <p:txBody>
-          <a:bodyPr/>
-          <a:lstStyle/>
-          <a:p>
-            <a:endParaRPr/>
-          </a:p>
-        </p:txBody>
-      </p:sp>
-      <p:sp>
-        <p:nvSpPr>
-          <p:cNvPr id="10" name="Shape 8"/>
-          <p:cNvSpPr/>
-          <p:nvPr/>
-        </p:nvSpPr>
-        <p:spPr>
-          <a:xfrm>
-            <a:off x="822960" y="2377440"/>
-            <a:ext cx="384048" cy="384048"/>
-          </a:xfrm>
-          <a:prstGeom prst="ellipse">
-            <a:avLst/>
-          </a:prstGeom>
-          <a:solidFill>
-            <a:srgbClr val="1E2761"/>
-          </a:solidFill>
-          <a:ln/>
-        </p:spPr>
-        <p:txBody>
-          <a:bodyPr/>
-          <a:lstStyle/>
-          <a:p>
-            <a:endParaRPr/>
-          </a:p>
-        </p:txBody>
-      </p:sp>
-      <p:pic>
-        <p:nvPicPr>
-          <p:cNvPr id="11" name="Image 0" descr="/tmp/work/deck/icons/landmark_navy.png"/>
-          <p:cNvPicPr>
-            <a:picLocks noChangeAspect="1"/>
-          </p:cNvPicPr>
-          <p:nvPr/>
-        </p:nvPicPr>
-        <p:blipFill>
-          <a:blip r:embed="rId3"/>
-          <a:stretch>
-            <a:fillRect/>
-          </a:stretch>
-        </p:blipFill>
-        <p:spPr>
-          <a:xfrm>
-            <a:off x="915132" y="2469612"/>
-            <a:ext cx="199705" cy="199705"/>
-          </a:xfrm>
-          <a:prstGeom prst="rect">
-            <a:avLst/>
-          </a:prstGeom>
-        </p:spPr>
-      </p:pic>
-      <p:sp>
-        <p:nvSpPr>
-          <p:cNvPr id="12" name="Text 9"/>
-          <p:cNvSpPr/>
-          <p:nvPr/>
-        </p:nvSpPr>
-        <p:spPr>
-          <a:xfrm>
-            <a:off x="1316736" y="2240280"/>
-            <a:ext cx="1929384" cy="658368"/>
-          </a:xfrm>
-          <a:prstGeom prst="rect">
-            <a:avLst/>
-          </a:prstGeom>
-          <a:noFill/>
-          <a:ln/>
-        </p:spPr>
-        <p:txBody>
-          <a:bodyPr wrap="square" lIns="0" tIns="0" rIns="0" bIns="0" rtlCol="0" anchor="ctr"/>
-          <a:lstStyle/>
-          <a:p>
-            <a:pPr marL="0" indent="0">
-              <a:lnSpc>
-                <a:spcPct val="105000"/>
-              </a:lnSpc>
-              <a:buNone/>
-            </a:pPr>
-            <a:r>
-              <a:rPr lang="en-US" sz="1050" b="1" dirty="0">
-                <a:solidFill>
-                  <a:srgbClr val="1E2761"/>
-                </a:solidFill>
-                <a:latin typeface="Calibri" pitchFamily="34" charset="0"/>
-                <a:ea typeface="Calibri" pitchFamily="34" charset="-122"/>
-                <a:cs typeface="Calibri" pitchFamily="34" charset="-120"/>
-              </a:rPr>
-              <a:t>Gobierno</a:t>
-            </a:r>
-            <a:endParaRPr lang="en-US" sz="1050" dirty="0"/>
-          </a:p>
-        </p:txBody>
-      </p:sp>
-      <p:sp>
-        <p:nvSpPr>
-          <p:cNvPr id="13" name="Text 10"/>
-          <p:cNvSpPr/>
-          <p:nvPr/>
-        </p:nvSpPr>
-        <p:spPr>
-          <a:xfrm>
-            <a:off x="3383280" y="2240280"/>
-            <a:ext cx="3794760" cy="658368"/>
-          </a:xfrm>
-          <a:prstGeom prst="rect">
-            <a:avLst/>
-          </a:prstGeom>
-          <a:noFill/>
-          <a:ln/>
-        </p:spPr>
-        <p:txBody>
-          <a:bodyPr wrap="square" lIns="0" tIns="0" rIns="0" bIns="0" rtlCol="0" anchor="ctr"/>
-          <a:lstStyle/>
-          <a:p>
-            <a:pPr marL="0" indent="0">
-              <a:lnSpc>
-                <a:spcPct val="108000"/>
-              </a:lnSpc>
-              <a:buNone/>
-            </a:pPr>
-            <a:r>
-              <a:rPr lang="en-US" sz="950" dirty="0">
-                <a:solidFill>
-                  <a:srgbClr val="27314D"/>
-                </a:solidFill>
-                <a:latin typeface="Calibri" pitchFamily="34" charset="0"/>
-                <a:ea typeface="Calibri" pitchFamily="34" charset="-122"/>
-                <a:cs typeface="Calibri" pitchFamily="34" charset="-120"/>
-              </a:rPr>
-              <a:t>CETES y otros instrumentos de deuda de corto plazo.</a:t>
-            </a:r>
-            <a:endParaRPr lang="en-US" sz="950" dirty="0"/>
-          </a:p>
-        </p:txBody>
-      </p:sp>
-      <p:sp>
-        <p:nvSpPr>
-          <p:cNvPr id="14" name="Text 11"/>
-          <p:cNvSpPr/>
-          <p:nvPr/>
-        </p:nvSpPr>
-        <p:spPr>
-          <a:xfrm>
-            <a:off x="7498080" y="2240280"/>
-            <a:ext cx="3685032" cy="658368"/>
-          </a:xfrm>
-          <a:prstGeom prst="rect">
-            <a:avLst/>
-          </a:prstGeom>
-          <a:noFill/>
-          <a:ln/>
-        </p:spPr>
-        <p:txBody>
-          <a:bodyPr wrap="square" lIns="0" tIns="0" rIns="0" bIns="0" rtlCol="0" anchor="ctr"/>
-          <a:lstStyle/>
-          <a:p>
-            <a:pPr marL="0" indent="0">
-              <a:lnSpc>
-                <a:spcPct val="108000"/>
-              </a:lnSpc>
-              <a:buNone/>
-            </a:pPr>
-            <a:r>
-              <a:rPr lang="en-US" sz="950" dirty="0">
-                <a:solidFill>
-                  <a:srgbClr val="27314D"/>
-                </a:solidFill>
-                <a:latin typeface="Calibri" pitchFamily="34" charset="0"/>
-                <a:ea typeface="Calibri" pitchFamily="34" charset="-122"/>
-                <a:cs typeface="Calibri" pitchFamily="34" charset="-120"/>
-              </a:rPr>
-              <a:t>Bonos M y Udibonos: deuda de largo plazo.</a:t>
-            </a:r>
-            <a:endParaRPr lang="en-US" sz="950" dirty="0"/>
-          </a:p>
-        </p:txBody>
-      </p:sp>
-      <p:sp>
-        <p:nvSpPr>
-          <p:cNvPr id="15" name="Shape 12"/>
-          <p:cNvSpPr/>
-          <p:nvPr/>
-        </p:nvSpPr>
-        <p:spPr>
-          <a:xfrm>
-            <a:off x="640080" y="2898648"/>
-            <a:ext cx="10908792" cy="658368"/>
-          </a:xfrm>
-          <a:prstGeom prst="rect">
-            <a:avLst/>
-          </a:prstGeom>
-          <a:solidFill>
-            <a:srgbClr val="FFFFFF"/>
-          </a:solidFill>
-          <a:ln/>
-        </p:spPr>
-        <p:txBody>
-          <a:bodyPr/>
-          <a:lstStyle/>
-          <a:p>
-            <a:endParaRPr/>
-          </a:p>
-        </p:txBody>
-      </p:sp>
-      <p:sp>
-        <p:nvSpPr>
-          <p:cNvPr id="16" name="Shape 13"/>
-          <p:cNvSpPr/>
-          <p:nvPr/>
-        </p:nvSpPr>
-        <p:spPr>
-          <a:xfrm>
-            <a:off x="822960" y="3035808"/>
-            <a:ext cx="384048" cy="384048"/>
-          </a:xfrm>
-          <a:prstGeom prst="ellipse">
-            <a:avLst/>
-          </a:prstGeom>
-          <a:solidFill>
-            <a:srgbClr val="1E2761"/>
-          </a:solidFill>
-          <a:ln/>
-        </p:spPr>
-        <p:txBody>
-          <a:bodyPr/>
-          <a:lstStyle/>
-          <a:p>
-            <a:endParaRPr/>
-          </a:p>
-        </p:txBody>
-      </p:sp>
-      <p:pic>
-        <p:nvPicPr>
-          <p:cNvPr id="17" name="Image 1" descr="/tmp/work/deck/icons/moneybill_navy.png"/>
-          <p:cNvPicPr>
-            <a:picLocks noChangeAspect="1"/>
-          </p:cNvPicPr>
-          <p:nvPr/>
-        </p:nvPicPr>
-        <p:blipFill>
-          <a:blip r:embed="rId4"/>
-          <a:stretch>
-            <a:fillRect/>
-          </a:stretch>
-        </p:blipFill>
-        <p:spPr>
-          <a:xfrm>
-            <a:off x="915132" y="3127980"/>
-            <a:ext cx="199705" cy="199705"/>
-          </a:xfrm>
-          <a:prstGeom prst="rect">
-            <a:avLst/>
-          </a:prstGeom>
-        </p:spPr>
-      </p:pic>
-      <p:sp>
-        <p:nvSpPr>
-          <p:cNvPr id="18" name="Text 14"/>
-          <p:cNvSpPr/>
-          <p:nvPr/>
-        </p:nvSpPr>
-        <p:spPr>
-          <a:xfrm>
-            <a:off x="1316736" y="2898648"/>
-            <a:ext cx="1929384" cy="658368"/>
-          </a:xfrm>
-          <a:prstGeom prst="rect">
-            <a:avLst/>
-          </a:prstGeom>
-          <a:noFill/>
-          <a:ln/>
-        </p:spPr>
-        <p:txBody>
-          <a:bodyPr wrap="square" lIns="0" tIns="0" rIns="0" bIns="0" rtlCol="0" anchor="ctr"/>
-          <a:lstStyle/>
-          <a:p>
-            <a:pPr marL="0" indent="0">
-              <a:lnSpc>
-                <a:spcPct val="105000"/>
-              </a:lnSpc>
-              <a:buNone/>
-            </a:pPr>
-            <a:r>
-              <a:rPr lang="en-US" sz="1050" b="1" dirty="0">
-                <a:solidFill>
-                  <a:srgbClr val="1E2761"/>
-                </a:solidFill>
-                <a:latin typeface="Calibri" pitchFamily="34" charset="0"/>
-                <a:ea typeface="Calibri" pitchFamily="34" charset="-122"/>
-                <a:cs typeface="Calibri" pitchFamily="34" charset="-120"/>
-              </a:rPr>
-              <a:t>Grandes empresas</a:t>
-            </a:r>
-            <a:endParaRPr lang="en-US" sz="1050" dirty="0"/>
-          </a:p>
-        </p:txBody>
-      </p:sp>
-      <p:sp>
-        <p:nvSpPr>
-          <p:cNvPr id="19" name="Text 15"/>
-          <p:cNvSpPr/>
-          <p:nvPr/>
-        </p:nvSpPr>
-        <p:spPr>
-          <a:xfrm>
-            <a:off x="3383280" y="2898648"/>
-            <a:ext cx="3794760" cy="658368"/>
-          </a:xfrm>
-          <a:prstGeom prst="rect">
-            <a:avLst/>
-          </a:prstGeom>
-          <a:noFill/>
-          <a:ln/>
-        </p:spPr>
-        <p:txBody>
-          <a:bodyPr wrap="square" lIns="0" tIns="0" rIns="0" bIns="0" rtlCol="0" anchor="ctr"/>
-          <a:lstStyle/>
-          <a:p>
-            <a:pPr marL="0" indent="0">
-              <a:lnSpc>
-                <a:spcPct val="108000"/>
-              </a:lnSpc>
-              <a:buNone/>
-            </a:pPr>
-            <a:r>
-              <a:rPr lang="en-US" sz="950" dirty="0">
-                <a:solidFill>
-                  <a:srgbClr val="27314D"/>
-                </a:solidFill>
-                <a:latin typeface="Calibri" pitchFamily="34" charset="0"/>
-                <a:ea typeface="Calibri" pitchFamily="34" charset="-122"/>
-                <a:cs typeface="Calibri" pitchFamily="34" charset="-120"/>
-              </a:rPr>
-              <a:t>Papel comercial para financiar capital de trabajo.</a:t>
-            </a:r>
-            <a:endParaRPr lang="en-US" sz="950" dirty="0"/>
-          </a:p>
-        </p:txBody>
-      </p:sp>
-      <p:sp>
-        <p:nvSpPr>
-          <p:cNvPr id="20" name="Text 16"/>
-          <p:cNvSpPr/>
-          <p:nvPr/>
-        </p:nvSpPr>
-        <p:spPr>
-          <a:xfrm>
-            <a:off x="7498080" y="2898648"/>
-            <a:ext cx="3685032" cy="658368"/>
-          </a:xfrm>
-          <a:prstGeom prst="rect">
-            <a:avLst/>
-          </a:prstGeom>
-          <a:noFill/>
-          <a:ln/>
-        </p:spPr>
-        <p:txBody>
-          <a:bodyPr wrap="square" lIns="0" tIns="0" rIns="0" bIns="0" rtlCol="0" anchor="ctr"/>
-          <a:lstStyle/>
-          <a:p>
-            <a:pPr marL="0" indent="0">
-              <a:lnSpc>
-                <a:spcPct val="108000"/>
-              </a:lnSpc>
-              <a:buNone/>
-            </a:pPr>
-            <a:r>
-              <a:rPr lang="en-US" sz="950" dirty="0">
-                <a:solidFill>
-                  <a:srgbClr val="27314D"/>
-                </a:solidFill>
-                <a:latin typeface="Calibri" pitchFamily="34" charset="0"/>
-                <a:ea typeface="Calibri" pitchFamily="34" charset="-122"/>
-                <a:cs typeface="Calibri" pitchFamily="34" charset="-120"/>
-              </a:rPr>
-              <a:t>Emisión de obligaciones y colocación de acciones en bolsa.</a:t>
-            </a:r>
-            <a:endParaRPr lang="en-US" sz="950" dirty="0"/>
-          </a:p>
-        </p:txBody>
-      </p:sp>
-      <p:sp>
-        <p:nvSpPr>
-          <p:cNvPr id="21" name="Shape 17"/>
-          <p:cNvSpPr/>
-          <p:nvPr/>
-        </p:nvSpPr>
-        <p:spPr>
-          <a:xfrm>
-            <a:off x="640080" y="3557016"/>
-            <a:ext cx="10908792" cy="658368"/>
-          </a:xfrm>
-          <a:prstGeom prst="rect">
-            <a:avLst/>
-          </a:prstGeom>
-          <a:solidFill>
-            <a:srgbClr val="EEF3FC"/>
-          </a:solidFill>
-          <a:ln/>
-        </p:spPr>
-        <p:txBody>
-          <a:bodyPr/>
-          <a:lstStyle/>
-          <a:p>
-            <a:endParaRPr/>
-          </a:p>
-        </p:txBody>
-      </p:sp>
-      <p:sp>
-        <p:nvSpPr>
-          <p:cNvPr id="22" name="Shape 18"/>
-          <p:cNvSpPr/>
-          <p:nvPr/>
-        </p:nvSpPr>
-        <p:spPr>
-          <a:xfrm>
-            <a:off x="822960" y="3694176"/>
-            <a:ext cx="384048" cy="384048"/>
-          </a:xfrm>
-          <a:prstGeom prst="ellipse">
-            <a:avLst/>
-          </a:prstGeom>
-          <a:solidFill>
-            <a:srgbClr val="1E2761"/>
-          </a:solidFill>
-          <a:ln/>
-        </p:spPr>
-        <p:txBody>
-          <a:bodyPr/>
-          <a:lstStyle/>
-          <a:p>
-            <a:endParaRPr/>
-          </a:p>
-        </p:txBody>
-      </p:sp>
-      <p:pic>
-        <p:nvPicPr>
-          <p:cNvPr id="23" name="Image 2" descr="/tmp/work/deck/icons/handholding_navy.png"/>
-          <p:cNvPicPr>
-            <a:picLocks noChangeAspect="1"/>
-          </p:cNvPicPr>
-          <p:nvPr/>
-        </p:nvPicPr>
-        <p:blipFill>
-          <a:blip r:embed="rId5"/>
-          <a:stretch>
-            <a:fillRect/>
-          </a:stretch>
-        </p:blipFill>
-        <p:spPr>
-          <a:xfrm>
-            <a:off x="915132" y="3786348"/>
-            <a:ext cx="199705" cy="199705"/>
-          </a:xfrm>
-          <a:prstGeom prst="rect">
-            <a:avLst/>
-          </a:prstGeom>
-        </p:spPr>
-      </p:pic>
-      <p:sp>
-        <p:nvSpPr>
-          <p:cNvPr id="24" name="Text 19"/>
-          <p:cNvSpPr/>
-          <p:nvPr/>
-        </p:nvSpPr>
-        <p:spPr>
-          <a:xfrm>
-            <a:off x="1316736" y="3557016"/>
-            <a:ext cx="1929384" cy="658368"/>
-          </a:xfrm>
-          <a:prstGeom prst="rect">
-            <a:avLst/>
-          </a:prstGeom>
-          <a:noFill/>
-          <a:ln/>
-        </p:spPr>
-        <p:txBody>
-          <a:bodyPr wrap="square" lIns="0" tIns="0" rIns="0" bIns="0" rtlCol="0" anchor="ctr"/>
-          <a:lstStyle/>
-          <a:p>
-            <a:pPr marL="0" indent="0">
-              <a:lnSpc>
-                <a:spcPct val="105000"/>
-              </a:lnSpc>
-              <a:buNone/>
-            </a:pPr>
-            <a:r>
-              <a:rPr lang="en-US" sz="1050" b="1" dirty="0">
-                <a:solidFill>
-                  <a:srgbClr val="1E2761"/>
-                </a:solidFill>
-                <a:latin typeface="Calibri" pitchFamily="34" charset="0"/>
-                <a:ea typeface="Calibri" pitchFamily="34" charset="-122"/>
-                <a:cs typeface="Calibri" pitchFamily="34" charset="-120"/>
-              </a:rPr>
-              <a:t>PyMEs</a:t>
-            </a:r>
-            <a:endParaRPr lang="en-US" sz="1050" dirty="0"/>
-          </a:p>
-        </p:txBody>
-      </p:sp>
-      <p:sp>
-        <p:nvSpPr>
-          <p:cNvPr id="25" name="Text 20"/>
-          <p:cNvSpPr/>
-          <p:nvPr/>
-        </p:nvSpPr>
-        <p:spPr>
-          <a:xfrm>
-            <a:off x="3383280" y="3557016"/>
-            <a:ext cx="3794760" cy="658368"/>
-          </a:xfrm>
-          <a:prstGeom prst="rect">
-            <a:avLst/>
-          </a:prstGeom>
-          <a:noFill/>
-          <a:ln/>
-        </p:spPr>
-        <p:txBody>
-          <a:bodyPr wrap="square" lIns="0" tIns="0" rIns="0" bIns="0" rtlCol="0" anchor="ctr"/>
-          <a:lstStyle/>
-          <a:p>
-            <a:pPr marL="0" indent="0">
-              <a:lnSpc>
-                <a:spcPct val="108000"/>
-              </a:lnSpc>
-              <a:buNone/>
-            </a:pPr>
-            <a:r>
-              <a:rPr lang="en-US" sz="950" dirty="0">
-                <a:solidFill>
-                  <a:srgbClr val="27314D"/>
-                </a:solidFill>
-                <a:latin typeface="Calibri" pitchFamily="34" charset="0"/>
-                <a:ea typeface="Calibri" pitchFamily="34" charset="-122"/>
-                <a:cs typeface="Calibri" pitchFamily="34" charset="-120"/>
-              </a:rPr>
-              <a:t>Crédito bancario de corto plazo, factoraje y crédito de proveedores.</a:t>
-            </a:r>
-            <a:endParaRPr lang="en-US" sz="950" dirty="0"/>
-          </a:p>
-        </p:txBody>
-      </p:sp>
-      <p:sp>
-        <p:nvSpPr>
-          <p:cNvPr id="26" name="Text 21"/>
-          <p:cNvSpPr/>
-          <p:nvPr/>
-        </p:nvSpPr>
-        <p:spPr>
-          <a:xfrm>
-            <a:off x="7498080" y="3557016"/>
-            <a:ext cx="3685032" cy="658368"/>
-          </a:xfrm>
-          <a:prstGeom prst="rect">
-            <a:avLst/>
-          </a:prstGeom>
-          <a:noFill/>
-          <a:ln/>
-        </p:spPr>
-        <p:txBody>
-          <a:bodyPr wrap="square" lIns="0" tIns="0" rIns="0" bIns="0" rtlCol="0" anchor="ctr"/>
-          <a:lstStyle/>
-          <a:p>
-            <a:pPr marL="0" indent="0">
-              <a:lnSpc>
-                <a:spcPct val="108000"/>
-              </a:lnSpc>
-              <a:buNone/>
-            </a:pPr>
-            <a:r>
-              <a:rPr lang="en-US" sz="950" dirty="0">
-                <a:solidFill>
-                  <a:srgbClr val="27314D"/>
-                </a:solidFill>
-                <a:latin typeface="Calibri" pitchFamily="34" charset="0"/>
-                <a:ea typeface="Calibri" pitchFamily="34" charset="-122"/>
-                <a:cs typeface="Calibri" pitchFamily="34" charset="-120"/>
-              </a:rPr>
-              <a:t>Acceso muy limitado; recurren a banca de desarrollo (NAFIN) en vez de la bolsa pública.</a:t>
-            </a:r>
-            <a:endParaRPr lang="en-US" sz="950" dirty="0"/>
-          </a:p>
-        </p:txBody>
-      </p:sp>
-      <p:sp>
-        <p:nvSpPr>
-          <p:cNvPr id="27" name="Shape 22"/>
-          <p:cNvSpPr/>
-          <p:nvPr/>
-        </p:nvSpPr>
-        <p:spPr>
-          <a:xfrm>
-            <a:off x="640080" y="4215384"/>
-            <a:ext cx="10908792" cy="658368"/>
-          </a:xfrm>
-          <a:prstGeom prst="rect">
-            <a:avLst/>
-          </a:prstGeom>
-          <a:solidFill>
-            <a:srgbClr val="FFFFFF"/>
-          </a:solidFill>
-          <a:ln/>
-        </p:spPr>
-        <p:txBody>
-          <a:bodyPr/>
-          <a:lstStyle/>
-          <a:p>
-            <a:endParaRPr/>
-          </a:p>
-        </p:txBody>
-      </p:sp>
-      <p:sp>
-        <p:nvSpPr>
-          <p:cNvPr id="28" name="Shape 23"/>
-          <p:cNvSpPr/>
-          <p:nvPr/>
-        </p:nvSpPr>
-        <p:spPr>
-          <a:xfrm>
-            <a:off x="822960" y="4352544"/>
-            <a:ext cx="384048" cy="384048"/>
-          </a:xfrm>
-          <a:prstGeom prst="ellipse">
-            <a:avLst/>
-          </a:prstGeom>
-          <a:solidFill>
-            <a:srgbClr val="1E2761"/>
-          </a:solidFill>
-          <a:ln/>
-        </p:spPr>
-        <p:txBody>
-          <a:bodyPr/>
-          <a:lstStyle/>
-          <a:p>
-            <a:endParaRPr/>
-          </a:p>
-        </p:txBody>
-      </p:sp>
-      <p:pic>
-        <p:nvPicPr>
-          <p:cNvPr id="29" name="Image 3" descr="/tmp/work/deck/icons/university_navy.png"/>
-          <p:cNvPicPr>
-            <a:picLocks noChangeAspect="1"/>
-          </p:cNvPicPr>
-          <p:nvPr/>
-        </p:nvPicPr>
-        <p:blipFill>
-          <a:blip r:embed="rId6"/>
-          <a:stretch>
-            <a:fillRect/>
-          </a:stretch>
-        </p:blipFill>
-        <p:spPr>
-          <a:xfrm>
-            <a:off x="915132" y="4444716"/>
-            <a:ext cx="199705" cy="199705"/>
-          </a:xfrm>
-          <a:prstGeom prst="rect">
-            <a:avLst/>
-          </a:prstGeom>
-        </p:spPr>
-      </p:pic>
-      <p:sp>
-        <p:nvSpPr>
-          <p:cNvPr id="30" name="Text 24"/>
-          <p:cNvSpPr/>
-          <p:nvPr/>
-        </p:nvSpPr>
-        <p:spPr>
-          <a:xfrm>
-            <a:off x="1316736" y="4215384"/>
-            <a:ext cx="1929384" cy="658368"/>
-          </a:xfrm>
-          <a:prstGeom prst="rect">
-            <a:avLst/>
-          </a:prstGeom>
-          <a:noFill/>
-          <a:ln/>
-        </p:spPr>
-        <p:txBody>
-          <a:bodyPr wrap="square" lIns="0" tIns="0" rIns="0" bIns="0" rtlCol="0" anchor="ctr"/>
-          <a:lstStyle/>
-          <a:p>
-            <a:pPr marL="0" indent="0">
-              <a:lnSpc>
-                <a:spcPct val="105000"/>
-              </a:lnSpc>
-              <a:buNone/>
-            </a:pPr>
-            <a:r>
-              <a:rPr lang="en-US" sz="1050" b="1" dirty="0">
-                <a:solidFill>
-                  <a:srgbClr val="1E2761"/>
-                </a:solidFill>
-                <a:latin typeface="Calibri" pitchFamily="34" charset="0"/>
-                <a:ea typeface="Calibri" pitchFamily="34" charset="-122"/>
-                <a:cs typeface="Calibri" pitchFamily="34" charset="-120"/>
-              </a:rPr>
-              <a:t>Bancos e intermediarios</a:t>
-            </a:r>
-            <a:endParaRPr lang="en-US" sz="1050" dirty="0"/>
-          </a:p>
-        </p:txBody>
-      </p:sp>
-      <p:sp>
-        <p:nvSpPr>
-          <p:cNvPr id="31" name="Text 25"/>
-          <p:cNvSpPr/>
-          <p:nvPr/>
-        </p:nvSpPr>
-        <p:spPr>
-          <a:xfrm>
-            <a:off x="3383280" y="4215384"/>
-            <a:ext cx="3794760" cy="658368"/>
-          </a:xfrm>
-          <a:prstGeom prst="rect">
-            <a:avLst/>
-          </a:prstGeom>
-          <a:noFill/>
-          <a:ln/>
-        </p:spPr>
-        <p:txBody>
-          <a:bodyPr wrap="square" lIns="0" tIns="0" rIns="0" bIns="0" rtlCol="0" anchor="ctr"/>
-          <a:lstStyle/>
-          <a:p>
-            <a:pPr marL="0" indent="0">
-              <a:lnSpc>
-                <a:spcPct val="108000"/>
-              </a:lnSpc>
-              <a:buNone/>
-            </a:pPr>
-            <a:r>
-              <a:rPr lang="en-US" sz="950" dirty="0">
-                <a:solidFill>
-                  <a:srgbClr val="27314D"/>
-                </a:solidFill>
-                <a:latin typeface="Calibri" pitchFamily="34" charset="0"/>
-                <a:ea typeface="Calibri" pitchFamily="34" charset="-122"/>
-                <a:cs typeface="Calibri" pitchFamily="34" charset="-120"/>
-              </a:rPr>
-              <a:t>Captación de depósitos; actúan como creadores de mercado.</a:t>
-            </a:r>
-            <a:endParaRPr lang="en-US" sz="950" dirty="0"/>
-          </a:p>
-        </p:txBody>
-      </p:sp>
-      <p:sp>
-        <p:nvSpPr>
-          <p:cNvPr id="32" name="Text 26"/>
-          <p:cNvSpPr/>
-          <p:nvPr/>
-        </p:nvSpPr>
-        <p:spPr>
-          <a:xfrm>
-            <a:off x="7498080" y="4215384"/>
-            <a:ext cx="3685032" cy="658368"/>
-          </a:xfrm>
-          <a:prstGeom prst="rect">
-            <a:avLst/>
-          </a:prstGeom>
-          <a:noFill/>
-          <a:ln/>
-        </p:spPr>
-        <p:txBody>
-          <a:bodyPr wrap="square" lIns="0" tIns="0" rIns="0" bIns="0" rtlCol="0" anchor="ctr"/>
-          <a:lstStyle/>
-          <a:p>
-            <a:pPr marL="0" indent="0">
-              <a:lnSpc>
-                <a:spcPct val="108000"/>
-              </a:lnSpc>
-              <a:buNone/>
-            </a:pPr>
-            <a:r>
-              <a:rPr lang="en-US" sz="950" dirty="0">
-                <a:solidFill>
-                  <a:srgbClr val="27314D"/>
-                </a:solidFill>
-                <a:latin typeface="Calibri" pitchFamily="34" charset="0"/>
-                <a:ea typeface="Calibri" pitchFamily="34" charset="-122"/>
-                <a:cs typeface="Calibri" pitchFamily="34" charset="-120"/>
-              </a:rPr>
-              <a:t>Colocación y garantía de emisiones (banca de inversión).</a:t>
-            </a:r>
-            <a:endParaRPr lang="en-US" sz="950" dirty="0"/>
-          </a:p>
-        </p:txBody>
-      </p:sp>
-      <p:sp>
-        <p:nvSpPr>
-          <p:cNvPr id="33" name="Shape 27"/>
-          <p:cNvSpPr/>
-          <p:nvPr/>
-        </p:nvSpPr>
-        <p:spPr>
-          <a:xfrm>
-            <a:off x="640080" y="4873752"/>
-            <a:ext cx="10908792" cy="658368"/>
-          </a:xfrm>
-          <a:prstGeom prst="rect">
-            <a:avLst/>
-          </a:prstGeom>
-          <a:solidFill>
-            <a:srgbClr val="EEF3FC"/>
-          </a:solidFill>
-          <a:ln/>
-        </p:spPr>
-        <p:txBody>
-          <a:bodyPr/>
-          <a:lstStyle/>
-          <a:p>
-            <a:endParaRPr/>
-          </a:p>
-        </p:txBody>
-      </p:sp>
-      <p:sp>
-        <p:nvSpPr>
-          <p:cNvPr id="34" name="Shape 28"/>
-          <p:cNvSpPr/>
-          <p:nvPr/>
-        </p:nvSpPr>
-        <p:spPr>
-          <a:xfrm>
-            <a:off x="822960" y="5010912"/>
-            <a:ext cx="384048" cy="384048"/>
-          </a:xfrm>
-          <a:prstGeom prst="ellipse">
-            <a:avLst/>
-          </a:prstGeom>
-          <a:solidFill>
-            <a:srgbClr val="1E2761"/>
-          </a:solidFill>
-          <a:ln/>
-        </p:spPr>
-        <p:txBody>
-          <a:bodyPr/>
-          <a:lstStyle/>
-          <a:p>
-            <a:endParaRPr/>
-          </a:p>
-        </p:txBody>
-      </p:sp>
-      <p:pic>
-        <p:nvPicPr>
-          <p:cNvPr id="35" name="Image 4" descr="/tmp/work/deck/icons/piggy_navy.png"/>
-          <p:cNvPicPr>
-            <a:picLocks noChangeAspect="1"/>
-          </p:cNvPicPr>
-          <p:nvPr/>
-        </p:nvPicPr>
-        <p:blipFill>
-          <a:blip r:embed="rId7"/>
-          <a:stretch>
-            <a:fillRect/>
-          </a:stretch>
-        </p:blipFill>
-        <p:spPr>
-          <a:xfrm>
-            <a:off x="915132" y="5103084"/>
-            <a:ext cx="199705" cy="199705"/>
-          </a:xfrm>
-          <a:prstGeom prst="rect">
-            <a:avLst/>
-          </a:prstGeom>
-        </p:spPr>
-      </p:pic>
-      <p:sp>
-        <p:nvSpPr>
-          <p:cNvPr id="36" name="Text 29"/>
-          <p:cNvSpPr/>
-          <p:nvPr/>
-        </p:nvSpPr>
-        <p:spPr>
-          <a:xfrm>
-            <a:off x="1316736" y="4873752"/>
-            <a:ext cx="1929384" cy="658368"/>
-          </a:xfrm>
-          <a:prstGeom prst="rect">
-            <a:avLst/>
-          </a:prstGeom>
-          <a:noFill/>
-          <a:ln/>
-        </p:spPr>
-        <p:txBody>
-          <a:bodyPr wrap="square" lIns="0" tIns="0" rIns="0" bIns="0" rtlCol="0" anchor="ctr"/>
-          <a:lstStyle/>
-          <a:p>
-            <a:pPr marL="0" indent="0">
-              <a:lnSpc>
-                <a:spcPct val="105000"/>
-              </a:lnSpc>
-              <a:buNone/>
-            </a:pPr>
-            <a:r>
-              <a:rPr lang="en-US" sz="1050" b="1" dirty="0">
-                <a:solidFill>
-                  <a:srgbClr val="1E2761"/>
-                </a:solidFill>
-                <a:latin typeface="Calibri" pitchFamily="34" charset="0"/>
-                <a:ea typeface="Calibri" pitchFamily="34" charset="-122"/>
-                <a:cs typeface="Calibri" pitchFamily="34" charset="-120"/>
-              </a:rPr>
-              <a:t>Personas físicas</a:t>
-            </a:r>
-            <a:endParaRPr lang="en-US" sz="1050" dirty="0"/>
-          </a:p>
-        </p:txBody>
-      </p:sp>
-      <p:sp>
-        <p:nvSpPr>
-          <p:cNvPr id="37" name="Text 30"/>
-          <p:cNvSpPr/>
-          <p:nvPr/>
-        </p:nvSpPr>
-        <p:spPr>
-          <a:xfrm>
-            <a:off x="3383280" y="4873752"/>
-            <a:ext cx="3794760" cy="658368"/>
-          </a:xfrm>
-          <a:prstGeom prst="rect">
-            <a:avLst/>
-          </a:prstGeom>
-          <a:noFill/>
-          <a:ln/>
-        </p:spPr>
-        <p:txBody>
-          <a:bodyPr wrap="square" lIns="0" tIns="0" rIns="0" bIns="0" rtlCol="0" anchor="ctr"/>
-          <a:lstStyle/>
-          <a:p>
-            <a:pPr marL="0" indent="0">
-              <a:lnSpc>
-                <a:spcPct val="108000"/>
-              </a:lnSpc>
-              <a:buNone/>
-            </a:pPr>
-            <a:r>
-              <a:rPr lang="en-US" sz="950" dirty="0">
-                <a:solidFill>
-                  <a:srgbClr val="27314D"/>
-                </a:solidFill>
-                <a:latin typeface="Calibri" pitchFamily="34" charset="0"/>
-                <a:ea typeface="Calibri" pitchFamily="34" charset="-122"/>
-                <a:cs typeface="Calibri" pitchFamily="34" charset="-120"/>
-              </a:rPr>
-              <a:t>Cuentas de ahorro y depósitos a la vista o a plazo.</a:t>
-            </a:r>
-            <a:endParaRPr lang="en-US" sz="950" dirty="0"/>
-          </a:p>
-        </p:txBody>
-      </p:sp>
-      <p:sp>
-        <p:nvSpPr>
-          <p:cNvPr id="38" name="Text 31"/>
-          <p:cNvSpPr/>
-          <p:nvPr/>
-        </p:nvSpPr>
-        <p:spPr>
-          <a:xfrm>
-            <a:off x="7498080" y="4873752"/>
-            <a:ext cx="3685032" cy="658368"/>
-          </a:xfrm>
-          <a:prstGeom prst="rect">
-            <a:avLst/>
-          </a:prstGeom>
-          <a:noFill/>
-          <a:ln/>
-        </p:spPr>
-        <p:txBody>
-          <a:bodyPr wrap="square" lIns="0" tIns="0" rIns="0" bIns="0" rtlCol="0" anchor="ctr"/>
-          <a:lstStyle/>
-          <a:p>
-            <a:pPr marL="0" indent="0">
-              <a:lnSpc>
-                <a:spcPct val="108000"/>
-              </a:lnSpc>
-              <a:buNone/>
-            </a:pPr>
-            <a:r>
-              <a:rPr lang="en-US" sz="950" dirty="0">
-                <a:solidFill>
-                  <a:srgbClr val="27314D"/>
-                </a:solidFill>
-                <a:latin typeface="Calibri" pitchFamily="34" charset="0"/>
-                <a:ea typeface="Calibri" pitchFamily="34" charset="-122"/>
-                <a:cs typeface="Calibri" pitchFamily="34" charset="-120"/>
-              </a:rPr>
-              <a:t>Acceso indirecto vía fondos de inversión, Afores o casas de bolsa.</a:t>
-            </a:r>
-            <a:endParaRPr lang="en-US" sz="950" dirty="0"/>
-          </a:p>
-        </p:txBody>
-      </p:sp>
-      <p:sp>
-        <p:nvSpPr>
-          <p:cNvPr id="39" name="Shape 32"/>
-          <p:cNvSpPr/>
-          <p:nvPr/>
-        </p:nvSpPr>
-        <p:spPr>
-          <a:xfrm>
-            <a:off x="640080" y="5532120"/>
-            <a:ext cx="10908792" cy="658368"/>
-          </a:xfrm>
-          <a:prstGeom prst="rect">
-            <a:avLst/>
-          </a:prstGeom>
-          <a:solidFill>
-            <a:srgbClr val="FFFFFF"/>
-          </a:solidFill>
-          <a:ln/>
-        </p:spPr>
-        <p:txBody>
-          <a:bodyPr/>
-          <a:lstStyle/>
-          <a:p>
-            <a:endParaRPr/>
-          </a:p>
-        </p:txBody>
-      </p:sp>
-      <p:sp>
-        <p:nvSpPr>
-          <p:cNvPr id="40" name="Shape 33"/>
-          <p:cNvSpPr/>
-          <p:nvPr/>
-        </p:nvSpPr>
-        <p:spPr>
-          <a:xfrm>
-            <a:off x="822960" y="5669280"/>
-            <a:ext cx="384048" cy="384048"/>
-          </a:xfrm>
-          <a:prstGeom prst="ellipse">
-            <a:avLst/>
-          </a:prstGeom>
-          <a:solidFill>
-            <a:srgbClr val="1E2761"/>
-          </a:solidFill>
-          <a:ln/>
-        </p:spPr>
-        <p:txBody>
-          <a:bodyPr/>
-          <a:lstStyle/>
-          <a:p>
-            <a:endParaRPr/>
-          </a:p>
-        </p:txBody>
-      </p:sp>
-      <p:pic>
-        <p:nvPicPr>
-          <p:cNvPr id="41" name="Image 5" descr="/tmp/work/deck/icons/shield_navy.png"/>
-          <p:cNvPicPr>
-            <a:picLocks noChangeAspect="1"/>
-          </p:cNvPicPr>
-          <p:nvPr/>
-        </p:nvPicPr>
-        <p:blipFill>
-          <a:blip r:embed="rId8"/>
-          <a:stretch>
-            <a:fillRect/>
-          </a:stretch>
-        </p:blipFill>
-        <p:spPr>
-          <a:xfrm>
-            <a:off x="915132" y="5761452"/>
-            <a:ext cx="199705" cy="199705"/>
-          </a:xfrm>
-          <a:prstGeom prst="rect">
-            <a:avLst/>
-          </a:prstGeom>
-        </p:spPr>
-      </p:pic>
-      <p:sp>
-        <p:nvSpPr>
-          <p:cNvPr id="42" name="Text 34"/>
-          <p:cNvSpPr/>
-          <p:nvPr/>
-        </p:nvSpPr>
-        <p:spPr>
-          <a:xfrm>
-            <a:off x="1316736" y="5532120"/>
-            <a:ext cx="1929384" cy="658368"/>
-          </a:xfrm>
-          <a:prstGeom prst="rect">
-            <a:avLst/>
-          </a:prstGeom>
-          <a:noFill/>
-          <a:ln/>
-        </p:spPr>
-        <p:txBody>
-          <a:bodyPr wrap="square" lIns="0" tIns="0" rIns="0" bIns="0" rtlCol="0" anchor="ctr"/>
-          <a:lstStyle/>
-          <a:p>
-            <a:pPr marL="0" indent="0">
-              <a:lnSpc>
-                <a:spcPct val="105000"/>
-              </a:lnSpc>
-              <a:buNone/>
-            </a:pPr>
-            <a:r>
-              <a:rPr lang="en-US" sz="1050" b="1" dirty="0">
-                <a:solidFill>
-                  <a:srgbClr val="1E2761"/>
-                </a:solidFill>
-                <a:latin typeface="Calibri" pitchFamily="34" charset="0"/>
-                <a:ea typeface="Calibri" pitchFamily="34" charset="-122"/>
-                <a:cs typeface="Calibri" pitchFamily="34" charset="-120"/>
-              </a:rPr>
-              <a:t>Inversionistas institucionales</a:t>
-            </a:r>
-            <a:endParaRPr lang="en-US" sz="1050" dirty="0"/>
-          </a:p>
-        </p:txBody>
-      </p:sp>
-      <p:sp>
-        <p:nvSpPr>
-          <p:cNvPr id="43" name="Text 35"/>
-          <p:cNvSpPr/>
-          <p:nvPr/>
-        </p:nvSpPr>
-        <p:spPr>
-          <a:xfrm>
-            <a:off x="3383280" y="5532120"/>
-            <a:ext cx="3794760" cy="658368"/>
-          </a:xfrm>
-          <a:prstGeom prst="rect">
-            <a:avLst/>
-          </a:prstGeom>
-          <a:noFill/>
-          <a:ln/>
-        </p:spPr>
-        <p:txBody>
-          <a:bodyPr wrap="square" lIns="0" tIns="0" rIns="0" bIns="0" rtlCol="0" anchor="ctr"/>
-          <a:lstStyle/>
-          <a:p>
-            <a:pPr marL="0" indent="0">
-              <a:lnSpc>
-                <a:spcPct val="108000"/>
-              </a:lnSpc>
-              <a:buNone/>
-            </a:pPr>
-            <a:r>
-              <a:rPr lang="en-US" sz="950" dirty="0">
-                <a:solidFill>
-                  <a:srgbClr val="27314D"/>
-                </a:solidFill>
-                <a:latin typeface="Calibri" pitchFamily="34" charset="0"/>
-                <a:ea typeface="Calibri" pitchFamily="34" charset="-122"/>
-                <a:cs typeface="Calibri" pitchFamily="34" charset="-120"/>
-              </a:rPr>
-              <a:t>Instrumentos líquidos de tesorería de corto plazo.</a:t>
-            </a:r>
-            <a:endParaRPr lang="en-US" sz="950" dirty="0"/>
-          </a:p>
-        </p:txBody>
-      </p:sp>
-      <p:sp>
-        <p:nvSpPr>
-          <p:cNvPr id="44" name="Text 36"/>
-          <p:cNvSpPr/>
-          <p:nvPr/>
-        </p:nvSpPr>
-        <p:spPr>
-          <a:xfrm>
-            <a:off x="7498080" y="5532120"/>
-            <a:ext cx="3685032" cy="658368"/>
-          </a:xfrm>
-          <a:prstGeom prst="rect">
-            <a:avLst/>
-          </a:prstGeom>
-          <a:noFill/>
-          <a:ln/>
-        </p:spPr>
-        <p:txBody>
-          <a:bodyPr wrap="square" lIns="0" tIns="0" rIns="0" bIns="0" rtlCol="0" anchor="ctr"/>
-          <a:lstStyle/>
-          <a:p>
-            <a:pPr marL="0" indent="0">
-              <a:lnSpc>
-                <a:spcPct val="108000"/>
-              </a:lnSpc>
-              <a:buNone/>
-            </a:pPr>
-            <a:r>
-              <a:rPr lang="en-US" sz="950" dirty="0">
-                <a:solidFill>
-                  <a:srgbClr val="27314D"/>
-                </a:solidFill>
-                <a:latin typeface="Calibri" pitchFamily="34" charset="0"/>
-                <a:ea typeface="Calibri" pitchFamily="34" charset="-122"/>
-                <a:cs typeface="Calibri" pitchFamily="34" charset="-120"/>
-              </a:rPr>
-              <a:t>Principal fuente de demanda de largo plazo: bonos y acciones.</a:t>
-            </a:r>
-            <a:endParaRPr lang="en-US" sz="950" dirty="0"/>
-          </a:p>
-        </p:txBody>
-      </p:sp>
-      <p:sp>
-        <p:nvSpPr>
-          <p:cNvPr id="45" name="Shape 37"/>
-          <p:cNvSpPr/>
-          <p:nvPr/>
-        </p:nvSpPr>
-        <p:spPr>
-          <a:xfrm>
-            <a:off x="640080" y="1783080"/>
-            <a:ext cx="10908792" cy="4407408"/>
-          </a:xfrm>
-          <a:prstGeom prst="rect">
-            <a:avLst/>
-          </a:prstGeom>
-          <a:ln w="12700">
-            <a:solidFill>
-              <a:srgbClr val="E1E7F5"/>
-            </a:solidFill>
-            <a:prstDash val="solid"/>
-          </a:ln>
-        </p:spPr>
-        <p:txBody>
-          <a:bodyPr/>
-          <a:lstStyle/>
-          <a:p>
-            <a:endParaRPr/>
-          </a:p>
-        </p:txBody>
-      </p:sp>
-      <p:sp>
-        <p:nvSpPr>
-          <p:cNvPr id="46" name="Text 38"/>
-          <p:cNvSpPr/>
-          <p:nvPr/>
-        </p:nvSpPr>
-        <p:spPr>
-          <a:xfrm>
-            <a:off x="640080" y="6400800"/>
-            <a:ext cx="9418320" cy="274320"/>
-          </a:xfrm>
-          <a:prstGeom prst="rect">
-            <a:avLst/>
-          </a:prstGeom>
-          <a:noFill/>
-          <a:ln/>
-        </p:spPr>
-        <p:txBody>
-          <a:bodyPr wrap="square" rtlCol="0" anchor="ctr"/>
-          <a:lstStyle/>
-          <a:p>
-            <a:pPr marL="0" indent="0">
-              <a:buNone/>
-            </a:pPr>
-            <a:r>
-              <a:rPr lang="en-US" sz="950" i="1" dirty="0">
-                <a:solidFill>
-                  <a:srgbClr val="5B6482"/>
-                </a:solidFill>
-                <a:latin typeface="Calibri" pitchFamily="34" charset="0"/>
-                <a:ea typeface="Calibri" pitchFamily="34" charset="-122"/>
-                <a:cs typeface="Calibri" pitchFamily="34" charset="-120"/>
-              </a:rPr>
-              <a:t>Elaboración propia a partir de Mántey de Anguiano (2024), Lección 2, y la organización del mercado de valores mexicano.</a:t>
-            </a:r>
-            <a:endParaRPr lang="en-US" sz="950" dirty="0"/>
-          </a:p>
-        </p:txBody>
-      </p:sp>
-      <p:sp>
-        <p:nvSpPr>
-          <p:cNvPr id="47" name="Text 39"/>
-          <p:cNvSpPr/>
-          <p:nvPr/>
-        </p:nvSpPr>
-        <p:spPr>
-          <a:xfrm>
-            <a:off x="11365992" y="6446520"/>
-            <a:ext cx="548640" cy="274320"/>
-          </a:xfrm>
-          <a:prstGeom prst="rect">
-            <a:avLst/>
-          </a:prstGeom>
-          <a:noFill/>
-          <a:ln/>
-        </p:spPr>
-        <p:txBody>
-          <a:bodyPr wrap="square" rtlCol="0" anchor="ctr"/>
-          <a:lstStyle/>
-          <a:p>
-            <a:pPr marL="0" indent="0" algn="r">
-              <a:buNone/>
-            </a:pPr>
-            <a:r>
-              <a:rPr lang="en-US" sz="1000" dirty="0">
-                <a:solidFill>
-                  <a:srgbClr val="A6ADC7"/>
-                </a:solidFill>
-                <a:latin typeface="Calibri" pitchFamily="34" charset="0"/>
-                <a:ea typeface="Calibri" pitchFamily="34" charset="-122"/>
-                <a:cs typeface="Calibri" pitchFamily="34" charset="-120"/>
-              </a:rPr>
-              <a:t>06</a:t>
-            </a:r>
-            <a:endParaRPr lang="en-US" sz="1000" dirty="0"/>
-          </a:p>
-        </p:txBody>
-      </p:sp>
-    </p:spTree>
-  </p:cSld>
-  <p:clrMapOvr>
-    <a:masterClrMapping/>
-  </p:clrMapOvr>
-</p:sld>
-</file>
-
-<file path=ppt/slides/slide7.xml><?xml version="1.0" encoding="utf-8"?>
-<p:sld xmlns:a="http://schemas.openxmlformats.org/drawingml/2006/main" xmlns:r="http://schemas.openxmlformats.org/officeDocument/2006/relationships" xmlns:p="http://schemas.openxmlformats.org/presentationml/2006/main">
-  <p:cSld>
-    <p:spTree>
-      <p:nvGrpSpPr>
-        <p:cNvPr id="1" name=""/>
-        <p:cNvGrpSpPr/>
-        <p:nvPr/>
-      </p:nvGrpSpPr>
-      <p:grpSpPr>
-        <a:xfrm>
-          <a:off x="0" y="0"/>
-          <a:ext cx="0" cy="0"/>
-          <a:chOff x="0" y="0"/>
-          <a:chExt cx="0" cy="0"/>
-        </a:xfrm>
-      </p:grpSpPr>
-      <p:sp>
-        <p:nvSpPr>
-          <p:cNvPr id="2" name="Text 0"/>
-          <p:cNvSpPr/>
-          <p:nvPr/>
-        </p:nvSpPr>
-        <p:spPr>
-          <a:xfrm>
-            <a:off x="640080" y="457200"/>
-            <a:ext cx="9144000" cy="320040"/>
-          </a:xfrm>
-          <a:prstGeom prst="rect">
-            <a:avLst/>
-          </a:prstGeom>
-          <a:noFill/>
-          <a:ln/>
-        </p:spPr>
-        <p:txBody>
-          <a:bodyPr wrap="square" rtlCol="0" anchor="ctr"/>
-          <a:lstStyle/>
-          <a:p>
-            <a:pPr marL="0" indent="0">
-              <a:buNone/>
-            </a:pPr>
-            <a:r>
-              <a:rPr lang="en-US" sz="1200" b="1" kern="0" spc="200" dirty="0">
-                <a:solidFill>
-                  <a:srgbClr val="C9A227"/>
-                </a:solidFill>
-                <a:latin typeface="Calibri" pitchFamily="34" charset="0"/>
-                <a:ea typeface="Calibri" pitchFamily="34" charset="-122"/>
-                <a:cs typeface="Calibri" pitchFamily="34" charset="-120"/>
-              </a:rPr>
-              <a:t>PREPARACIÓN DOCENTE</a:t>
-            </a:r>
-            <a:endParaRPr lang="en-US" sz="1200" dirty="0"/>
-          </a:p>
-        </p:txBody>
-      </p:sp>
-      <p:sp>
-        <p:nvSpPr>
-          <p:cNvPr id="3" name="Shape 1"/>
-          <p:cNvSpPr/>
-          <p:nvPr/>
-        </p:nvSpPr>
-        <p:spPr>
-          <a:xfrm>
-            <a:off x="10771632" y="457200"/>
-            <a:ext cx="640080" cy="640080"/>
-          </a:xfrm>
-          <a:prstGeom prst="ellipse">
-            <a:avLst/>
-          </a:prstGeom>
-          <a:solidFill>
-            <a:srgbClr val="EEF3FC"/>
-          </a:solidFill>
-          <a:ln/>
-        </p:spPr>
-        <p:txBody>
-          <a:bodyPr/>
-          <a:lstStyle/>
-          <a:p>
-            <a:endParaRPr/>
-          </a:p>
-        </p:txBody>
-      </p:sp>
-      <p:pic>
-        <p:nvPicPr>
-          <p:cNvPr id="4" name="Image 0" descr="/tmp/work/deck/icons/bookopen_navy.png"/>
-          <p:cNvPicPr>
-            <a:picLocks noChangeAspect="1"/>
-          </p:cNvPicPr>
-          <p:nvPr/>
-        </p:nvPicPr>
-        <p:blipFill>
-          <a:blip r:embed="rId3"/>
-          <a:stretch>
-            <a:fillRect/>
-          </a:stretch>
-        </p:blipFill>
-        <p:spPr>
-          <a:xfrm>
-            <a:off x="10931652" y="617220"/>
-            <a:ext cx="320040" cy="320040"/>
-          </a:xfrm>
-          <a:prstGeom prst="rect">
-            <a:avLst/>
-          </a:prstGeom>
-        </p:spPr>
-      </p:pic>
-      <p:sp>
-        <p:nvSpPr>
-          <p:cNvPr id="5" name="Text 2"/>
-          <p:cNvSpPr/>
-          <p:nvPr/>
-        </p:nvSpPr>
-        <p:spPr>
-          <a:xfrm>
-            <a:off x="640080" y="749808"/>
-            <a:ext cx="9601200" cy="777240"/>
-          </a:xfrm>
-          <a:prstGeom prst="rect">
-            <a:avLst/>
-          </a:prstGeom>
-          <a:noFill/>
-          <a:ln/>
-        </p:spPr>
-        <p:txBody>
-          <a:bodyPr wrap="square" lIns="0" tIns="0" rIns="0" bIns="0" rtlCol="0" anchor="ctr"/>
-          <a:lstStyle/>
-          <a:p>
-            <a:pPr marL="0" indent="0">
-              <a:buNone/>
-            </a:pPr>
-            <a:r>
-              <a:rPr lang="en-US" sz="3200" b="1" dirty="0">
-                <a:solidFill>
-                  <a:srgbClr val="1E2761"/>
-                </a:solidFill>
-                <a:latin typeface="Cambria" pitchFamily="34" charset="0"/>
-                <a:ea typeface="Cambria" pitchFamily="34" charset="-122"/>
-                <a:cs typeface="Cambria" pitchFamily="34" charset="-120"/>
-              </a:rPr>
-              <a:t>Fuentes y referencias recomendadas</a:t>
-            </a:r>
-            <a:endParaRPr lang="en-US" sz="3200" dirty="0"/>
-          </a:p>
-        </p:txBody>
-      </p:sp>
-      <p:sp>
-        <p:nvSpPr>
-          <p:cNvPr id="36" name="Text 27"/>
-          <p:cNvSpPr/>
-          <p:nvPr/>
-        </p:nvSpPr>
-        <p:spPr>
-          <a:xfrm>
-            <a:off x="11365992" y="6446520"/>
-            <a:ext cx="548640" cy="274320"/>
-          </a:xfrm>
-          <a:prstGeom prst="rect">
-            <a:avLst/>
-          </a:prstGeom>
-          <a:noFill/>
-          <a:ln/>
-        </p:spPr>
-        <p:txBody>
-          <a:bodyPr wrap="square" rtlCol="0" anchor="ctr"/>
-          <a:lstStyle/>
-          <a:p>
-            <a:pPr marL="0" indent="0" algn="r">
-              <a:buNone/>
-            </a:pPr>
-            <a:r>
-              <a:rPr lang="en-US" sz="1000" dirty="0">
-                <a:solidFill>
-                  <a:srgbClr val="A6ADC7"/>
-                </a:solidFill>
-                <a:latin typeface="Calibri" pitchFamily="34" charset="0"/>
-                <a:ea typeface="Calibri" pitchFamily="34" charset="-122"/>
-                <a:cs typeface="Calibri" pitchFamily="34" charset="-120"/>
-              </a:rPr>
-              <a:t>07</a:t>
-            </a:r>
-            <a:endParaRPr lang="en-US" sz="1000" dirty="0"/>
-          </a:p>
-        </p:txBody>
-      </p:sp>
-      <p:sp>
-        <p:nvSpPr>
-          <p:cNvPr id="37" name="TextBox 36"/>
-          <p:cNvSpPr txBox="1"/>
-          <p:nvPr/>
-        </p:nvSpPr>
-        <p:spPr>
-          <a:xfrm>
-            <a:off x="640080" y="1691640"/>
-            <a:ext cx="9749188" cy="512961"/>
-          </a:xfrm>
-          <a:prstGeom prst="rect">
-            <a:avLst/>
-          </a:prstGeom>
-          <a:noFill/>
-        </p:spPr>
-        <p:txBody>
-          <a:bodyPr wrap="square">
-            <a:spAutoFit/>
-          </a:bodyPr>
-          <a:lstStyle/>
-          <a:p>
-            <a:pPr>
-              <a:spcAft>
-                <a:spcPts val="400"/>
-              </a:spcAft>
-            </a:pPr>
-            <a:r>
-              <a:rPr sz="1300" b="1" i="0" dirty="0" err="1">
-                <a:solidFill>
-                  <a:srgbClr val="1E2761"/>
-                </a:solidFill>
-                <a:latin typeface="Calibri"/>
-              </a:rPr>
-              <a:t>Mántey</a:t>
-            </a:r>
-            <a:r>
-              <a:rPr sz="1300" b="1" i="0" dirty="0">
-                <a:solidFill>
-                  <a:srgbClr val="1E2761"/>
-                </a:solidFill>
-                <a:latin typeface="Calibri"/>
-              </a:rPr>
-              <a:t> de Anguiano, G. (2024). </a:t>
-            </a:r>
-            <a:r>
-              <a:rPr sz="1300" b="1" i="0" dirty="0" err="1">
-                <a:solidFill>
-                  <a:srgbClr val="1E2761"/>
-                </a:solidFill>
-                <a:latin typeface="Calibri"/>
-              </a:rPr>
-              <a:t>Lecciones</a:t>
-            </a:r>
-            <a:r>
-              <a:rPr sz="1300" b="1" i="0" dirty="0">
-                <a:solidFill>
-                  <a:srgbClr val="1E2761"/>
-                </a:solidFill>
-                <a:latin typeface="Calibri"/>
-              </a:rPr>
-              <a:t> de Economía </a:t>
-            </a:r>
-            <a:r>
-              <a:rPr sz="1300" b="1" i="0" dirty="0" err="1">
-                <a:solidFill>
-                  <a:srgbClr val="1E2761"/>
-                </a:solidFill>
-                <a:latin typeface="Calibri"/>
-              </a:rPr>
-              <a:t>Monetaria</a:t>
-            </a:r>
-            <a:r>
-              <a:rPr sz="1300" b="1" i="0" dirty="0">
-                <a:solidFill>
-                  <a:srgbClr val="1E2761"/>
-                </a:solidFill>
-                <a:latin typeface="Calibri"/>
-              </a:rPr>
-              <a:t>. UNAM.</a:t>
-            </a:r>
-          </a:p>
-          <a:p>
-            <a:pPr>
-              <a:spcAft>
-                <a:spcPts val="400"/>
-              </a:spcAft>
-            </a:pPr>
-            <a:r>
-              <a:rPr sz="1100" b="0" i="0" dirty="0" err="1">
-                <a:solidFill>
-                  <a:srgbClr val="5B6482"/>
-                </a:solidFill>
-                <a:latin typeface="Calibri"/>
-              </a:rPr>
-              <a:t>Lección</a:t>
-            </a:r>
-            <a:r>
-              <a:rPr sz="1100" b="0" i="0" dirty="0">
-                <a:solidFill>
-                  <a:srgbClr val="5B6482"/>
-                </a:solidFill>
-                <a:latin typeface="Calibri"/>
-              </a:rPr>
-              <a:t> 2: </a:t>
-            </a:r>
-            <a:r>
-              <a:rPr sz="1100" b="0" i="0" dirty="0" err="1">
-                <a:solidFill>
-                  <a:srgbClr val="5B6482"/>
-                </a:solidFill>
-                <a:latin typeface="Calibri"/>
-              </a:rPr>
-              <a:t>clasificación</a:t>
-            </a:r>
-            <a:r>
-              <a:rPr sz="1100" b="0" i="0" dirty="0">
-                <a:solidFill>
-                  <a:srgbClr val="5B6482"/>
-                </a:solidFill>
-                <a:latin typeface="Calibri"/>
-              </a:rPr>
-              <a:t> de </a:t>
-            </a:r>
-            <a:r>
-              <a:rPr sz="1100" b="0" i="0" dirty="0" err="1">
-                <a:solidFill>
-                  <a:srgbClr val="5B6482"/>
-                </a:solidFill>
-                <a:latin typeface="Calibri"/>
-              </a:rPr>
-              <a:t>activos</a:t>
-            </a:r>
-            <a:r>
-              <a:rPr sz="1100" b="0" i="0" dirty="0">
-                <a:solidFill>
-                  <a:srgbClr val="5B6482"/>
-                </a:solidFill>
-                <a:latin typeface="Calibri"/>
-              </a:rPr>
-              <a:t> y mercado de dinero/</a:t>
-            </a:r>
-            <a:r>
-              <a:rPr sz="1100" b="0" i="0" dirty="0" err="1">
-                <a:solidFill>
-                  <a:srgbClr val="5B6482"/>
-                </a:solidFill>
-                <a:latin typeface="Calibri"/>
-              </a:rPr>
-              <a:t>capitales</a:t>
-            </a:r>
-            <a:r>
-              <a:rPr sz="1100" b="0" i="0" dirty="0">
-                <a:solidFill>
-                  <a:srgbClr val="5B6482"/>
-                </a:solidFill>
-                <a:latin typeface="Calibri"/>
-              </a:rPr>
-              <a:t>.</a:t>
-            </a:r>
-          </a:p>
-        </p:txBody>
-      </p:sp>
-      <p:sp>
-        <p:nvSpPr>
-          <p:cNvPr id="38" name="TextBox 37"/>
-          <p:cNvSpPr txBox="1"/>
-          <p:nvPr/>
-        </p:nvSpPr>
-        <p:spPr>
-          <a:xfrm>
-            <a:off x="640080" y="2443614"/>
-            <a:ext cx="9642508" cy="512961"/>
-          </a:xfrm>
-          <a:prstGeom prst="rect">
-            <a:avLst/>
-          </a:prstGeom>
-          <a:noFill/>
-        </p:spPr>
-        <p:txBody>
-          <a:bodyPr wrap="square">
-            <a:spAutoFit/>
-          </a:bodyPr>
-          <a:lstStyle/>
-          <a:p>
-            <a:pPr>
-              <a:spcAft>
-                <a:spcPts val="400"/>
-              </a:spcAft>
-            </a:pPr>
-            <a:r>
-              <a:rPr sz="1300" b="1" i="0" dirty="0">
-                <a:solidFill>
-                  <a:srgbClr val="1E2761"/>
-                </a:solidFill>
-                <a:latin typeface="Calibri"/>
-              </a:rPr>
-              <a:t>Mishkin, F. S. y Eakins, S. G. (2014). Financial Markets and Institutions (8ª ed.). Pearson.</a:t>
-            </a:r>
-          </a:p>
-          <a:p>
-            <a:pPr>
-              <a:spcAft>
-                <a:spcPts val="400"/>
-              </a:spcAft>
-            </a:pPr>
-            <a:r>
-              <a:rPr sz="1100" b="0" i="0" dirty="0">
-                <a:solidFill>
-                  <a:srgbClr val="5B6482"/>
-                </a:solidFill>
-                <a:latin typeface="Calibri"/>
-              </a:rPr>
-              <a:t>Cap. 11, "The Money Markets".</a:t>
-            </a:r>
-          </a:p>
-        </p:txBody>
-      </p:sp>
-    </p:spTree>
-  </p:cSld>
-  <p:clrMapOvr>
-    <a:masterClrMapping/>
-  </p:clrMapOvr>
-</p:sld>
-</file>
-
-<file path=ppt/slides/slide8.xml><?xml version="1.0" encoding="utf-8"?>
-<p:sld xmlns:a="http://schemas.openxmlformats.org/drawingml/2006/main" xmlns:r="http://schemas.openxmlformats.org/officeDocument/2006/relationships" xmlns:p="http://schemas.openxmlformats.org/presentationml/2006/main">
-  <p:cSld>
-    <p:spTree>
-      <p:nvGrpSpPr>
-        <p:cNvPr id="1" name=""/>
-        <p:cNvGrpSpPr/>
-        <p:nvPr/>
-      </p:nvGrpSpPr>
-      <p:grpSpPr>
-        <a:xfrm>
-          <a:off x="0" y="0"/>
-          <a:ext cx="0" cy="0"/>
-          <a:chOff x="0" y="0"/>
-          <a:chExt cx="0" cy="0"/>
-        </a:xfrm>
-      </p:grpSpPr>
-      <p:sp>
-        <p:nvSpPr>
-          <p:cNvPr id="2" name="Shape 0"/>
-          <p:cNvSpPr/>
-          <p:nvPr/>
-        </p:nvSpPr>
-        <p:spPr>
-          <a:xfrm>
-            <a:off x="-1828800" y="4389120"/>
-            <a:ext cx="5029200" cy="5029200"/>
-          </a:xfrm>
-          <a:prstGeom prst="ellipse">
-            <a:avLst/>
-          </a:prstGeom>
-          <a:solidFill>
-            <a:srgbClr val="141B4D"/>
-          </a:solidFill>
-          <a:ln/>
-        </p:spPr>
-        <p:txBody>
-          <a:bodyPr/>
-          <a:lstStyle/>
-          <a:p>
-            <a:endParaRPr/>
-          </a:p>
-        </p:txBody>
-      </p:sp>
-      <p:sp>
-        <p:nvSpPr>
-          <p:cNvPr id="3" name="Text 1"/>
-          <p:cNvSpPr/>
-          <p:nvPr/>
-        </p:nvSpPr>
-        <p:spPr>
-          <a:xfrm>
-            <a:off x="822960" y="640080"/>
-            <a:ext cx="7315200" cy="365760"/>
-          </a:xfrm>
-          <a:prstGeom prst="rect">
-            <a:avLst/>
-          </a:prstGeom>
-          <a:noFill/>
-          <a:ln/>
-        </p:spPr>
-        <p:txBody>
-          <a:bodyPr wrap="square" rtlCol="0" anchor="ctr"/>
-          <a:lstStyle/>
-          <a:p>
-            <a:pPr marL="0" indent="0">
-              <a:buNone/>
-            </a:pPr>
-            <a:r>
-              <a:rPr lang="en-US" sz="1300" b="1" kern="0" spc="200" dirty="0">
-                <a:solidFill>
-                  <a:srgbClr val="C9A227"/>
-                </a:solidFill>
-                <a:latin typeface="Calibri" pitchFamily="34" charset="0"/>
-                <a:ea typeface="Calibri" pitchFamily="34" charset="-122"/>
-                <a:cs typeface="Calibri" pitchFamily="34" charset="-120"/>
-              </a:rPr>
-              <a:t>CIERRE · CLASIFICACIÓN DE ACTIVOS Y MERCADOS</a:t>
+              <a:t>CIERRE · CLASIFICACIÓN DE ACTIVOS FINANCIEROS</a:t>
             </a:r>
             <a:endParaRPr lang="en-US" sz="1300" dirty="0"/>
           </a:p>
@@ -7061,7 +3944,7 @@
                 </a:solidFill>
                 <a:latin typeface="Calibri"/>
               </a:rPr>
-              <a:t>El activo financiero es deuda directa, deuda indirecta o participación de capital, según quién emite la obligación — no según su plazo.</a:t>
+              <a:t>El activo financiero es deuda directa, deuda indirecta o participación de capital, según quién emite la obligación.</a:t>
             </a:r>
           </a:p>
         </p:txBody>
@@ -7100,7 +3983,7 @@
                 </a:solidFill>
                 <a:latin typeface="Calibri"/>
               </a:rPr>
-              <a:t>El mercado de dinero (corto plazo, liquidez) y el mercado de capitales (largo plazo, inversión productiva) canalizan el ahorro según el plazo; los derivados son un tercer segmento.</a:t>
+              <a:t>Lo que separa deuda directa de indirecta no es solo quién firma formalmente, sino si ese emisor es el deudor final o un intermediario que absorbe el riesgo de crédito en su lugar.</a:t>
             </a:r>
           </a:p>
         </p:txBody>
@@ -7139,46 +4022,7 @@
                 </a:solidFill>
                 <a:latin typeface="Calibri"/>
               </a:rPr>
-              <a:t>Cada agente económico (gobierno, empresas, PyMEs, bancos, personas físicas, institucionales) accede de forma distinta a ambos mercados.</a:t>
-            </a:r>
-          </a:p>
-        </p:txBody>
-      </p:sp>
-      <p:sp>
-        <p:nvSpPr>
-          <p:cNvPr id="21" name="TextBox 20"/>
-          <p:cNvSpPr txBox="1"/>
-          <p:nvPr/>
-        </p:nvSpPr>
-        <p:spPr>
-          <a:xfrm>
-            <a:off x="777240" y="3867910"/>
-            <a:ext cx="10332720" cy="868680"/>
-          </a:xfrm>
-          <a:prstGeom prst="rect">
-            <a:avLst/>
-          </a:prstGeom>
-          <a:noFill/>
-        </p:spPr>
-        <p:txBody>
-          <a:bodyPr wrap="square">
-            <a:spAutoFit/>
-          </a:bodyPr>
-          <a:lstStyle/>
-          <a:p>
-            <a:pPr>
-              <a:lnSpc>
-                <a:spcPct val="110000"/>
-              </a:lnSpc>
-            </a:pPr>
-            <a:r>
-              <a:rPr sz="1350" b="0" i="0">
-                <a:solidFill>
-                  <a:srgbClr val="1E2761"/>
-                </a:solidFill>
-                <a:latin typeface="Calibri"/>
-              </a:rPr>
-              <a:t>Plazo y tipo de emisor son clasificaciones independientes: un instrumento de largo plazo puede seguir siendo deuda indirecta si lo emite un intermediario.</a:t>
+              <a:t>El direct lending (fondos que prestan directo a una empresa) sigue siendo deuda directa: el fondo es vehículo del inversionista, no un intermediario que absorbe el riesgo como lo haría un banco.</a:t>
             </a:r>
           </a:p>
         </p:txBody>
